--- a/docs/submission/presenter-kit/explanation-en.pptx
+++ b/docs/submission/presenter-kit/explanation-en.pptx
@@ -872,7 +872,7 @@
             <a:r>
               <a:rPr lang="en-US" dirty="0"/>
               <a:t>Separate working integration from improved behavior
-These are saved observations from three different tracks. Research used five search seeds and 60 unseen worlds per profile; final body energy also fell. The video predates the environment-TX implementation.
+These are saved observations from three different tracks. Research used five search seeds and 60 unseen worlds per profile; final body energy also fell. The new recording includes current environment TXs. Full-foraging readouts are separate from public Q-learning.
 A roughly one-minute script: We are building a framework for using biological decision models in applications and testing whether learning helps. First, we record the environment, including hazards, in a transaction. A confirmed stimulus then adds food, and the agent chooses movement or rest. Learning replays that environment and experience, adopting an improved candidate. The demo lets us trace inputs, decisions and learning. A separate controlled experiment improved reward, but did not establish a biological advantage. Next, we will compare the same task against small AI models, measuring adaptation speed and resource use.
 Sources: docs/submission/sepolia-evidence.json; presenter-kit/capture-evidence.json; docs/research/bioagent-adaptation/README.md. Timing is a suggested pace, not measured narration.</a:t>
             </a:r>
@@ -3062,7 +3062,7 @@
                   <a:srgbClr val="153C38"/>
                 </a:solidFill>
               </a:rPr>
-              <a:t>Video: four full agents, 1 Aqua and 11 V3 settlements</a:t>
+              <a:t>Video: four full agents, 2 Aqua and 25 V3 settlements</a:t>
             </a:r>
             <a:endParaRPr lang="en-US" sz="2000" dirty="0"/>
           </a:p>

--- a/docs/submission/presenter-kit/explanation-en.pptx
+++ b/docs/submission/presenter-kit/explanation-en.pptx
@@ -11,9 +11,10 @@
     <p:sldId id="259" r:id="rId5"/>
     <p:sldId id="260" r:id="rId6"/>
     <p:sldId id="261" r:id="rId7"/>
+    <p:sldId id="262" r:id="rId8"/>
   </p:sldIdLst>
   <p:notesMasterIdLst>
-    <p:notesMasterId r:id="rId8"/>
+    <p:notesMasterId r:id="rId9"/>
   </p:notesMasterIdLst>
   <p:sldSz cx="12192000" cy="6858000"/>
   <p:notesSz cx="6858000" cy="12192000"/>
@@ -989,6 +990,97 @@
             <a:fld id="{F7021451-1387-4CA6-816F-3879F97B5CBC}" type="slidenum">
               <a:rPr lang="en-US"/>
               <a:t>6</a:t>
+            </a:fld>
+            <a:endParaRPr lang="en-US"/>
+          </a:p>
+        </p:txBody>
+      </p:sp>
+    </p:spTree>
+    <p:extLst>
+      <p:ext uri="{BB962C8B-B14F-4D97-AF65-F5344CB8AC3E}">
+        <p14:creationId xmlns:p14="http://schemas.microsoft.com/office/powerpoint/2010/main" val="1024086991"/>
+      </p:ext>
+    </p:extLst>
+  </p:cSld>
+  <p:clrMapOvr>
+    <a:masterClrMapping/>
+  </p:clrMapOvr>
+</p:notes>
+</file>
+
+<file path=ppt/notesSlides/notesSlide7.xml><?xml version="1.0" encoding="utf-8"?>
+<p:notes xmlns:a="http://schemas.openxmlformats.org/drawingml/2006/main" xmlns:r="http://schemas.openxmlformats.org/officeDocument/2006/relationships" xmlns:p="http://schemas.openxmlformats.org/presentationml/2006/main">
+  <p:cSld>
+    <p:spTree>
+      <p:nvGrpSpPr>
+        <p:cNvPr id="1" name=""/>
+        <p:cNvGrpSpPr/>
+        <p:nvPr/>
+      </p:nvGrpSpPr>
+      <p:grpSpPr>
+        <a:xfrm>
+          <a:off x="0" y="0"/>
+          <a:ext cx="0" cy="0"/>
+          <a:chOff x="0" y="0"/>
+          <a:chExt cx="0" cy="0"/>
+        </a:xfrm>
+      </p:grpSpPr>
+      <p:sp>
+        <p:nvSpPr>
+          <p:cNvPr id="2" name="Slide Image Placeholder 1"/>
+          <p:cNvSpPr>
+            <a:spLocks noGrp="1" noRot="1" noChangeAspect="1"/>
+          </p:cNvSpPr>
+          <p:nvPr>
+            <p:ph type="sldImg"/>
+          </p:nvPr>
+        </p:nvSpPr>
+        <p:spPr/>
+      </p:sp>
+      <p:sp>
+        <p:nvSpPr>
+          <p:cNvPr id="3" name="Notes Placeholder 2"/>
+          <p:cNvSpPr>
+            <a:spLocks noGrp="1"/>
+          </p:cNvSpPr>
+          <p:nvPr>
+            <p:ph type="body" idx="1"/>
+          </p:nvPr>
+        </p:nvSpPr>
+        <p:spPr/>
+        <p:txBody>
+          <a:bodyPr/>
+          <a:lstStyle/>
+          <a:p>
+            <a:r>
+              <a:rPr lang="en-US" dirty="0"/>
+              <a:t>Where code runs and what crosses each boundary
+Public mode computes seven-neuron decisions and Q-learning inside the JavaScript browser runtime. Workers serves assets and verified inputs. Its scheduled writer uses the owner key in a Worker Secret and a Durable Object send journal. Manual Sepolia writes use the owner browser wallet; Anvil uses local accounts. Full mode places world/reward/execution logic in Node.js, which communicates with a Python child over stdin/stdout JSON Lines. Python computes 166,700 neurons and learned readouts; it does not use signing keys. Foraging experience lives in SQLite, market readouts in JSON, and public policies/consumed-food history in localStorage. Solidity enforces owners, revisions/nonces, inputs and settlement; it does not perform inference or learning. Shared TypeScript types are a proposal, not universal runtime integration. The independent JS framework is also a separate implementation. Details: docs/architecture.en.md.
+A roughly one-minute script: We are building a framework for using biological decision models in applications and testing whether learning helps. First, we record the environment, including hazards, in a transaction. A confirmed stimulus then adds food, and the agent chooses movement or rest. Learning replays that environment and experience, adopting an improved candidate. The demo lets us trace inputs, decisions and learning. A separate controlled experiment improved reward, but did not establish a biological advantage. Next, we will compare the same task against small AI models, measuring adaptation speed and resource use.
+Sources: docs/submission/sepolia-evidence.json; presenter-kit/capture-evidence.json; docs/research/bioagent-adaptation/README.md. Timing is a suggested pace, not measured narration.</a:t>
+            </a:r>
+            <a:endParaRPr lang="en-US" dirty="0"/>
+          </a:p>
+        </p:txBody>
+      </p:sp>
+      <p:sp>
+        <p:nvSpPr>
+          <p:cNvPr id="4" name="Slide Number Placeholder 3"/>
+          <p:cNvSpPr>
+            <a:spLocks noGrp="1"/>
+          </p:cNvSpPr>
+          <p:nvPr>
+            <p:ph type="sldNum" sz="quarter" idx="10"/>
+          </p:nvPr>
+        </p:nvSpPr>
+        <p:spPr/>
+        <p:txBody>
+          <a:bodyPr/>
+          <a:lstStyle/>
+          <a:p>
+            <a:fld id="{F7021451-1387-4CA6-816F-3879F97B5CBC}" type="slidenum">
+              <a:rPr lang="en-US"/>
+              <a:t>7</a:t>
             </a:fld>
             <a:endParaRPr lang="en-US"/>
           </a:p>
@@ -1684,7 +1776,7 @@
                   <a:srgbClr val="607B70"/>
                 </a:solidFill>
               </a:rPr>
-              <a:t>1 / 6    ·    0–10s    ·    2026-09-26</a:t>
+              <a:t>1 / 7    ·    0–10s    ·    2026-09-26</a:t>
             </a:r>
             <a:endParaRPr lang="en-US" sz="1000" dirty="0"/>
           </a:p>
@@ -2068,7 +2160,7 @@
                   <a:srgbClr val="607B70"/>
                 </a:solidFill>
               </a:rPr>
-              <a:t>2 / 6    ·    10–20s    ·    2026-09-26</a:t>
+              <a:t>2 / 7    ·    10–20s    ·    2026-09-26</a:t>
             </a:r>
             <a:endParaRPr lang="en-US" sz="1000" dirty="0"/>
           </a:p>
@@ -2452,7 +2544,7 @@
                   <a:srgbClr val="607B70"/>
                 </a:solidFill>
               </a:rPr>
-              <a:t>3 / 6    ·    20–30s    ·    2026-09-26</a:t>
+              <a:t>3 / 7    ·    20–30s    ·    2026-09-26</a:t>
             </a:r>
             <a:endParaRPr lang="en-US" sz="1000" dirty="0"/>
           </a:p>
@@ -2836,7 +2928,7 @@
                   <a:srgbClr val="607B70"/>
                 </a:solidFill>
               </a:rPr>
-              <a:t>4 / 6    ·    30–40s    ·    2026-09-26</a:t>
+              <a:t>4 / 7    ·    30–40s    ·    2026-09-26</a:t>
             </a:r>
             <a:endParaRPr lang="en-US" sz="1000" dirty="0"/>
           </a:p>
@@ -3220,7 +3312,7 @@
                   <a:srgbClr val="607B70"/>
                 </a:solidFill>
               </a:rPr>
-              <a:t>5 / 6    ·    40–50s    ·    2026-09-26</a:t>
+              <a:t>5 / 7    ·    40–50s    ·    2026-09-26</a:t>
             </a:r>
             <a:endParaRPr lang="en-US" sz="1000" dirty="0"/>
           </a:p>
@@ -3604,7 +3696,2473 @@
                   <a:srgbClr val="607B70"/>
                 </a:solidFill>
               </a:rPr>
-              <a:t>6 / 6    ·    50–60s    ·    2026-09-26</a:t>
+              <a:t>6 / 7    ·    50–60s    ·    2026-09-26</a:t>
+            </a:r>
+            <a:endParaRPr lang="en-US" sz="1000" dirty="0"/>
+          </a:p>
+        </p:txBody>
+      </p:sp>
+    </p:spTree>
+  </p:cSld>
+  <p:clrMapOvr>
+    <a:masterClrMapping/>
+  </p:clrMapOvr>
+</p:sld>
+</file>
+
+<file path=ppt/slides/slide7.xml><?xml version="1.0" encoding="utf-8"?>
+<p:sld xmlns:a="http://schemas.openxmlformats.org/drawingml/2006/main" xmlns:r="http://schemas.openxmlformats.org/officeDocument/2006/relationships" xmlns:p="http://schemas.openxmlformats.org/presentationml/2006/main">
+  <p:cSld name="Slide 7">
+    <p:bg>
+      <p:bgPr>
+        <a:solidFill>
+          <a:srgbClr val="F4F6EF"/>
+        </a:solidFill>
+      </p:bgPr>
+    </p:bg>
+    <p:spTree>
+      <p:nvGrpSpPr>
+        <p:cNvPr id="1" name=""/>
+        <p:cNvGrpSpPr/>
+        <p:nvPr/>
+      </p:nvGrpSpPr>
+      <p:grpSpPr>
+        <a:xfrm>
+          <a:off x="0" y="0"/>
+          <a:ext cx="0" cy="0"/>
+          <a:chOff x="0" y="0"/>
+          <a:chExt cx="0" cy="0"/>
+        </a:xfrm>
+      </p:grpSpPr>
+      <p:sp>
+        <p:nvSpPr>
+          <p:cNvPr id="2" name="Text 0"/>
+          <p:cNvSpPr/>
+          <p:nvPr/>
+        </p:nvSpPr>
+        <p:spPr>
+          <a:xfrm>
+            <a:off x="548640" y="384048"/>
+            <a:ext cx="11064240" cy="274320"/>
+          </a:xfrm>
+          <a:prstGeom prst="rect">
+            <a:avLst/>
+          </a:prstGeom>
+          <a:noFill/>
+          <a:ln/>
+        </p:spPr>
+        <p:txBody>
+          <a:bodyPr wrap="square" lIns="0" tIns="0" rIns="0" bIns="0" rtlCol="0" anchor="ctr"/>
+          <a:lstStyle/>
+          <a:p>
+            <a:pPr indent="0" marL="0">
+              <a:buNone/>
+            </a:pPr>
+            <a:r>
+              <a:rPr lang="en-US" sz="1200" b="1" dirty="0">
+                <a:solidFill>
+                  <a:srgbClr val="26735F"/>
+                </a:solidFill>
+              </a:rPr>
+              <a:t>BIOAGENT  /  APPENDIX · BOUNDARIES &amp; LANGUAGES</a:t>
+            </a:r>
+            <a:endParaRPr lang="en-US" sz="1200" dirty="0"/>
+          </a:p>
+        </p:txBody>
+      </p:sp>
+      <p:sp>
+        <p:nvSpPr>
+          <p:cNvPr id="3" name="Text 1"/>
+          <p:cNvSpPr/>
+          <p:nvPr/>
+        </p:nvSpPr>
+        <p:spPr>
+          <a:xfrm>
+            <a:off x="548640" y="850392"/>
+            <a:ext cx="11064240" cy="640080"/>
+          </a:xfrm>
+          <a:prstGeom prst="rect">
+            <a:avLst/>
+          </a:prstGeom>
+          <a:noFill/>
+          <a:ln/>
+        </p:spPr>
+        <p:txBody>
+          <a:bodyPr wrap="square" lIns="0" tIns="0" rIns="0" bIns="0" rtlCol="0" anchor="ctr"/>
+          <a:lstStyle/>
+          <a:p>
+            <a:pPr indent="0" marL="0">
+              <a:buNone/>
+            </a:pPr>
+            <a:r>
+              <a:rPr lang="en-US" sz="3100" b="1" dirty="0">
+                <a:solidFill>
+                  <a:srgbClr val="153C38"/>
+                </a:solidFill>
+              </a:rPr>
+              <a:t>Where code runs and what crosses each boundary</a:t>
+            </a:r>
+            <a:endParaRPr lang="en-US" sz="3100" dirty="0"/>
+          </a:p>
+        </p:txBody>
+      </p:sp>
+      <p:graphicFrame>
+        <p:nvGraphicFramePr>
+          <p:cNvPr id="8" name="Table 0"/>
+          <p:cNvGraphicFramePr>
+            <a:graphicFrameLocks noGrp="1"/>
+          </p:cNvGraphicFramePr>
+          <p:nvPr>
+            <p:extLst>
+              <p:ext uri="{D42A27DB-BD31-4B8C-83A1-F6EECF244321}">
+                <p14:modId xmlns:p14="http://schemas.microsoft.com/office/powerpoint/2010/main" val="1579011935"/>
+              </p:ext>
+            </p:extLst>
+          </p:nvPr>
+        </p:nvGraphicFramePr>
+        <p:xfrm>
+          <a:off x="548640" y="1673352"/>
+          <a:ext cx="11064240" cy="3977640"/>
+        </p:xfrm>
+        <a:graphic>
+          <a:graphicData uri="http://schemas.openxmlformats.org/drawingml/2006/table">
+            <a:tbl>
+              <a:tblPr/>
+              <a:tblGrid>
+                <a:gridCol w="1691640"/>
+                <a:gridCol w="2606040"/>
+                <a:gridCol w="3520440"/>
+                <a:gridCol w="3246120"/>
+              </a:tblGrid>
+              <a:tr h="521208">
+                <a:tc>
+                  <a:txBody>
+                    <a:bodyPr/>
+                    <a:lstStyle/>
+                    <a:p>
+                      <a:pPr indent="0" marL="0">
+                        <a:buNone/>
+                      </a:pPr>
+                      <a:r>
+                        <a:rPr lang="en-US" sz="1250" b="1" dirty="0">
+                          <a:solidFill>
+                            <a:srgbClr val="FFFFFF"/>
+                          </a:solidFill>
+                          <a:latin typeface="Noto Sans CJK JP" pitchFamily="34" charset="0"/>
+                          <a:ea typeface="Noto Sans CJK JP" pitchFamily="34" charset="-122"/>
+                          <a:cs typeface="Noto Sans CJK JP" pitchFamily="34" charset="-120"/>
+                        </a:rPr>
+                        <a:t>Boundary</a:t>
+                      </a:r>
+                      <a:endParaRPr lang="en-US" sz="1250" dirty="0">
+                        <a:latin typeface="Noto Sans CJK JP" charset="0"/>
+                        <a:ea typeface="Noto Sans CJK JP" charset="0"/>
+                        <a:cs typeface="Noto Sans CJK JP" charset="0"/>
+                      </a:endParaRPr>
+                    </a:p>
+                  </a:txBody>
+                  <a:tcPr marL="54864" marR="54864" marT="54864" marB="54864" anchor="mid">
+                    <a:lnL w="7620" cap="flat" cmpd="sng" algn="ctr">
+                      <a:solidFill>
+                        <a:srgbClr val="CBD8CE"/>
+                      </a:solidFill>
+                      <a:prstDash val="solid"/>
+                      <a:round/>
+                      <a:headEnd type="none" w="med" len="med"/>
+                      <a:tailEnd type="none" w="med" len="med"/>
+                    </a:lnL>
+                    <a:lnR w="7620" cap="flat" cmpd="sng" algn="ctr">
+                      <a:solidFill>
+                        <a:srgbClr val="CBD8CE"/>
+                      </a:solidFill>
+                      <a:prstDash val="solid"/>
+                      <a:round/>
+                      <a:headEnd type="none" w="med" len="med"/>
+                      <a:tailEnd type="none" w="med" len="med"/>
+                    </a:lnR>
+                    <a:lnT w="7620" cap="flat" cmpd="sng" algn="ctr">
+                      <a:solidFill>
+                        <a:srgbClr val="CBD8CE"/>
+                      </a:solidFill>
+                      <a:prstDash val="solid"/>
+                      <a:round/>
+                      <a:headEnd type="none" w="med" len="med"/>
+                      <a:tailEnd type="none" w="med" len="med"/>
+                    </a:lnT>
+                    <a:lnB w="7620" cap="flat" cmpd="sng" algn="ctr">
+                      <a:solidFill>
+                        <a:srgbClr val="CBD8CE"/>
+                      </a:solidFill>
+                      <a:prstDash val="solid"/>
+                      <a:round/>
+                      <a:headEnd type="none" w="med" len="med"/>
+                      <a:tailEnd type="none" w="med" len="med"/>
+                    </a:lnB>
+                    <a:solidFill>
+                      <a:srgbClr val="26735F"/>
+                    </a:solidFill>
+                  </a:tcPr>
+                </a:tc>
+                <a:tc>
+                  <a:txBody>
+                    <a:bodyPr/>
+                    <a:lstStyle/>
+                    <a:p>
+                      <a:pPr indent="0" marL="0">
+                        <a:buNone/>
+                      </a:pPr>
+                      <a:r>
+                        <a:rPr lang="en-US" sz="1250" b="1" dirty="0">
+                          <a:solidFill>
+                            <a:srgbClr val="FFFFFF"/>
+                          </a:solidFill>
+                          <a:latin typeface="Noto Sans CJK JP" pitchFamily="34" charset="0"/>
+                          <a:ea typeface="Noto Sans CJK JP" pitchFamily="34" charset="-122"/>
+                          <a:cs typeface="Noto Sans CJK JP" pitchFamily="34" charset="-120"/>
+                        </a:rPr>
+                        <a:t>Language / runtime</a:t>
+                      </a:r>
+                      <a:endParaRPr lang="en-US" sz="1250" dirty="0">
+                        <a:latin typeface="Noto Sans CJK JP" charset="0"/>
+                        <a:ea typeface="Noto Sans CJK JP" charset="0"/>
+                        <a:cs typeface="Noto Sans CJK JP" charset="0"/>
+                      </a:endParaRPr>
+                    </a:p>
+                  </a:txBody>
+                  <a:tcPr marL="54864" marR="54864" marT="54864" marB="54864" anchor="mid">
+                    <a:lnL w="7620" cap="flat" cmpd="sng" algn="ctr">
+                      <a:solidFill>
+                        <a:srgbClr val="CBD8CE"/>
+                      </a:solidFill>
+                      <a:prstDash val="solid"/>
+                      <a:round/>
+                      <a:headEnd type="none" w="med" len="med"/>
+                      <a:tailEnd type="none" w="med" len="med"/>
+                    </a:lnL>
+                    <a:lnR w="7620" cap="flat" cmpd="sng" algn="ctr">
+                      <a:solidFill>
+                        <a:srgbClr val="CBD8CE"/>
+                      </a:solidFill>
+                      <a:prstDash val="solid"/>
+                      <a:round/>
+                      <a:headEnd type="none" w="med" len="med"/>
+                      <a:tailEnd type="none" w="med" len="med"/>
+                    </a:lnR>
+                    <a:lnT w="7620" cap="flat" cmpd="sng" algn="ctr">
+                      <a:solidFill>
+                        <a:srgbClr val="CBD8CE"/>
+                      </a:solidFill>
+                      <a:prstDash val="solid"/>
+                      <a:round/>
+                      <a:headEnd type="none" w="med" len="med"/>
+                      <a:tailEnd type="none" w="med" len="med"/>
+                    </a:lnT>
+                    <a:lnB w="7620" cap="flat" cmpd="sng" algn="ctr">
+                      <a:solidFill>
+                        <a:srgbClr val="CBD8CE"/>
+                      </a:solidFill>
+                      <a:prstDash val="solid"/>
+                      <a:round/>
+                      <a:headEnd type="none" w="med" len="med"/>
+                      <a:tailEnd type="none" w="med" len="med"/>
+                    </a:lnB>
+                    <a:solidFill>
+                      <a:srgbClr val="26735F"/>
+                    </a:solidFill>
+                  </a:tcPr>
+                </a:tc>
+                <a:tc>
+                  <a:txBody>
+                    <a:bodyPr/>
+                    <a:lstStyle/>
+                    <a:p>
+                      <a:pPr indent="0" marL="0">
+                        <a:buNone/>
+                      </a:pPr>
+                      <a:r>
+                        <a:rPr lang="en-US" sz="1250" b="1" dirty="0">
+                          <a:solidFill>
+                            <a:srgbClr val="FFFFFF"/>
+                          </a:solidFill>
+                          <a:latin typeface="Noto Sans CJK JP" pitchFamily="34" charset="0"/>
+                          <a:ea typeface="Noto Sans CJK JP" pitchFamily="34" charset="-122"/>
+                          <a:cs typeface="Noto Sans CJK JP" pitchFamily="34" charset="-120"/>
+                        </a:rPr>
+                        <a:t>Responsibility</a:t>
+                      </a:r>
+                      <a:endParaRPr lang="en-US" sz="1250" dirty="0">
+                        <a:latin typeface="Noto Sans CJK JP" charset="0"/>
+                        <a:ea typeface="Noto Sans CJK JP" charset="0"/>
+                        <a:cs typeface="Noto Sans CJK JP" charset="0"/>
+                      </a:endParaRPr>
+                    </a:p>
+                  </a:txBody>
+                  <a:tcPr marL="54864" marR="54864" marT="54864" marB="54864" anchor="mid">
+                    <a:lnL w="7620" cap="flat" cmpd="sng" algn="ctr">
+                      <a:solidFill>
+                        <a:srgbClr val="CBD8CE"/>
+                      </a:solidFill>
+                      <a:prstDash val="solid"/>
+                      <a:round/>
+                      <a:headEnd type="none" w="med" len="med"/>
+                      <a:tailEnd type="none" w="med" len="med"/>
+                    </a:lnL>
+                    <a:lnR w="7620" cap="flat" cmpd="sng" algn="ctr">
+                      <a:solidFill>
+                        <a:srgbClr val="CBD8CE"/>
+                      </a:solidFill>
+                      <a:prstDash val="solid"/>
+                      <a:round/>
+                      <a:headEnd type="none" w="med" len="med"/>
+                      <a:tailEnd type="none" w="med" len="med"/>
+                    </a:lnR>
+                    <a:lnT w="7620" cap="flat" cmpd="sng" algn="ctr">
+                      <a:solidFill>
+                        <a:srgbClr val="CBD8CE"/>
+                      </a:solidFill>
+                      <a:prstDash val="solid"/>
+                      <a:round/>
+                      <a:headEnd type="none" w="med" len="med"/>
+                      <a:tailEnd type="none" w="med" len="med"/>
+                    </a:lnT>
+                    <a:lnB w="7620" cap="flat" cmpd="sng" algn="ctr">
+                      <a:solidFill>
+                        <a:srgbClr val="CBD8CE"/>
+                      </a:solidFill>
+                      <a:prstDash val="solid"/>
+                      <a:round/>
+                      <a:headEnd type="none" w="med" len="med"/>
+                      <a:tailEnd type="none" w="med" len="med"/>
+                    </a:lnB>
+                    <a:solidFill>
+                      <a:srgbClr val="26735F"/>
+                    </a:solidFill>
+                  </a:tcPr>
+                </a:tc>
+                <a:tc>
+                  <a:txBody>
+                    <a:bodyPr/>
+                    <a:lstStyle/>
+                    <a:p>
+                      <a:pPr indent="0" marL="0">
+                        <a:buNone/>
+                      </a:pPr>
+                      <a:r>
+                        <a:rPr lang="en-US" sz="1250" b="1" dirty="0">
+                          <a:solidFill>
+                            <a:srgbClr val="FFFFFF"/>
+                          </a:solidFill>
+                          <a:latin typeface="Noto Sans CJK JP" pitchFamily="34" charset="0"/>
+                          <a:ea typeface="Noto Sans CJK JP" pitchFamily="34" charset="-122"/>
+                          <a:cs typeface="Noto Sans CJK JP" pitchFamily="34" charset="-120"/>
+                        </a:rPr>
+                        <a:t>Data crossing it</a:t>
+                      </a:r>
+                      <a:endParaRPr lang="en-US" sz="1250" dirty="0">
+                        <a:latin typeface="Noto Sans CJK JP" charset="0"/>
+                        <a:ea typeface="Noto Sans CJK JP" charset="0"/>
+                        <a:cs typeface="Noto Sans CJK JP" charset="0"/>
+                      </a:endParaRPr>
+                    </a:p>
+                  </a:txBody>
+                  <a:tcPr marL="54864" marR="54864" marT="54864" marB="54864" anchor="mid">
+                    <a:lnL w="7620" cap="flat" cmpd="sng" algn="ctr">
+                      <a:solidFill>
+                        <a:srgbClr val="CBD8CE"/>
+                      </a:solidFill>
+                      <a:prstDash val="solid"/>
+                      <a:round/>
+                      <a:headEnd type="none" w="med" len="med"/>
+                      <a:tailEnd type="none" w="med" len="med"/>
+                    </a:lnL>
+                    <a:lnR w="7620" cap="flat" cmpd="sng" algn="ctr">
+                      <a:solidFill>
+                        <a:srgbClr val="CBD8CE"/>
+                      </a:solidFill>
+                      <a:prstDash val="solid"/>
+                      <a:round/>
+                      <a:headEnd type="none" w="med" len="med"/>
+                      <a:tailEnd type="none" w="med" len="med"/>
+                    </a:lnR>
+                    <a:lnT w="7620" cap="flat" cmpd="sng" algn="ctr">
+                      <a:solidFill>
+                        <a:srgbClr val="CBD8CE"/>
+                      </a:solidFill>
+                      <a:prstDash val="solid"/>
+                      <a:round/>
+                      <a:headEnd type="none" w="med" len="med"/>
+                      <a:tailEnd type="none" w="med" len="med"/>
+                    </a:lnT>
+                    <a:lnB w="7620" cap="flat" cmpd="sng" algn="ctr">
+                      <a:solidFill>
+                        <a:srgbClr val="CBD8CE"/>
+                      </a:solidFill>
+                      <a:prstDash val="solid"/>
+                      <a:round/>
+                      <a:headEnd type="none" w="med" len="med"/>
+                      <a:tailEnd type="none" w="med" len="med"/>
+                    </a:lnB>
+                    <a:solidFill>
+                      <a:srgbClr val="26735F"/>
+                    </a:solidFill>
+                  </a:tcPr>
+                </a:tc>
+              </a:tr>
+              <a:tr h="521208">
+                <a:tc>
+                  <a:txBody>
+                    <a:bodyPr/>
+                    <a:lstStyle/>
+                    <a:p>
+                      <a:pPr indent="0" marL="0">
+                        <a:buNone/>
+                      </a:pPr>
+                      <a:r>
+                        <a:rPr lang="en-US" sz="1250" dirty="0">
+                          <a:solidFill>
+                            <a:srgbClr val="153C38"/>
+                          </a:solidFill>
+                          <a:latin typeface="Noto Sans CJK JP" pitchFamily="34" charset="0"/>
+                          <a:ea typeface="Noto Sans CJK JP" pitchFamily="34" charset="-122"/>
+                          <a:cs typeface="Noto Sans CJK JP" pitchFamily="34" charset="-120"/>
+                        </a:rPr>
+                        <a:t>Browser</a:t>
+                      </a:r>
+                      <a:endParaRPr lang="en-US" sz="1250" dirty="0">
+                        <a:latin typeface="Noto Sans CJK JP" charset="0"/>
+                        <a:ea typeface="Noto Sans CJK JP" charset="0"/>
+                        <a:cs typeface="Noto Sans CJK JP" charset="0"/>
+                      </a:endParaRPr>
+                    </a:p>
+                  </a:txBody>
+                  <a:tcPr marL="54864" marR="54864" marT="54864" marB="54864" anchor="mid">
+                    <a:lnL w="7620" cap="flat" cmpd="sng" algn="ctr">
+                      <a:solidFill>
+                        <a:srgbClr val="CBD8CE"/>
+                      </a:solidFill>
+                      <a:prstDash val="solid"/>
+                      <a:round/>
+                      <a:headEnd type="none" w="med" len="med"/>
+                      <a:tailEnd type="none" w="med" len="med"/>
+                    </a:lnL>
+                    <a:lnR w="7620" cap="flat" cmpd="sng" algn="ctr">
+                      <a:solidFill>
+                        <a:srgbClr val="CBD8CE"/>
+                      </a:solidFill>
+                      <a:prstDash val="solid"/>
+                      <a:round/>
+                      <a:headEnd type="none" w="med" len="med"/>
+                      <a:tailEnd type="none" w="med" len="med"/>
+                    </a:lnR>
+                    <a:lnT w="7620" cap="flat" cmpd="sng" algn="ctr">
+                      <a:solidFill>
+                        <a:srgbClr val="CBD8CE"/>
+                      </a:solidFill>
+                      <a:prstDash val="solid"/>
+                      <a:round/>
+                      <a:headEnd type="none" w="med" len="med"/>
+                      <a:tailEnd type="none" w="med" len="med"/>
+                    </a:lnT>
+                    <a:lnB w="7620" cap="flat" cmpd="sng" algn="ctr">
+                      <a:solidFill>
+                        <a:srgbClr val="CBD8CE"/>
+                      </a:solidFill>
+                      <a:prstDash val="solid"/>
+                      <a:round/>
+                      <a:headEnd type="none" w="med" len="med"/>
+                      <a:tailEnd type="none" w="med" len="med"/>
+                    </a:lnB>
+                    <a:solidFill>
+                      <a:srgbClr val="F4F6EF"/>
+                    </a:solidFill>
+                  </a:tcPr>
+                </a:tc>
+                <a:tc>
+                  <a:txBody>
+                    <a:bodyPr/>
+                    <a:lstStyle/>
+                    <a:p>
+                      <a:pPr indent="0" marL="0">
+                        <a:buNone/>
+                      </a:pPr>
+                      <a:r>
+                        <a:rPr lang="en-US" sz="1250" dirty="0">
+                          <a:solidFill>
+                            <a:srgbClr val="153C38"/>
+                          </a:solidFill>
+                          <a:latin typeface="Noto Sans CJK JP" pitchFamily="34" charset="0"/>
+                          <a:ea typeface="Noto Sans CJK JP" pitchFamily="34" charset="-122"/>
+                          <a:cs typeface="Noto Sans CJK JP" pitchFamily="34" charset="-120"/>
+                        </a:rPr>
+                        <a:t>JavaScript / HTML / CSS</a:t>
+                      </a:r>
+                      <a:endParaRPr lang="en-US" sz="1250" dirty="0">
+                        <a:latin typeface="Noto Sans CJK JP" charset="0"/>
+                        <a:ea typeface="Noto Sans CJK JP" charset="0"/>
+                        <a:cs typeface="Noto Sans CJK JP" charset="0"/>
+                      </a:endParaRPr>
+                    </a:p>
+                  </a:txBody>
+                  <a:tcPr marL="54864" marR="54864" marT="54864" marB="54864" anchor="mid">
+                    <a:lnL w="7620" cap="flat" cmpd="sng" algn="ctr">
+                      <a:solidFill>
+                        <a:srgbClr val="CBD8CE"/>
+                      </a:solidFill>
+                      <a:prstDash val="solid"/>
+                      <a:round/>
+                      <a:headEnd type="none" w="med" len="med"/>
+                      <a:tailEnd type="none" w="med" len="med"/>
+                    </a:lnL>
+                    <a:lnR w="7620" cap="flat" cmpd="sng" algn="ctr">
+                      <a:solidFill>
+                        <a:srgbClr val="CBD8CE"/>
+                      </a:solidFill>
+                      <a:prstDash val="solid"/>
+                      <a:round/>
+                      <a:headEnd type="none" w="med" len="med"/>
+                      <a:tailEnd type="none" w="med" len="med"/>
+                    </a:lnR>
+                    <a:lnT w="7620" cap="flat" cmpd="sng" algn="ctr">
+                      <a:solidFill>
+                        <a:srgbClr val="CBD8CE"/>
+                      </a:solidFill>
+                      <a:prstDash val="solid"/>
+                      <a:round/>
+                      <a:headEnd type="none" w="med" len="med"/>
+                      <a:tailEnd type="none" w="med" len="med"/>
+                    </a:lnT>
+                    <a:lnB w="7620" cap="flat" cmpd="sng" algn="ctr">
+                      <a:solidFill>
+                        <a:srgbClr val="CBD8CE"/>
+                      </a:solidFill>
+                      <a:prstDash val="solid"/>
+                      <a:round/>
+                      <a:headEnd type="none" w="med" len="med"/>
+                      <a:tailEnd type="none" w="med" len="med"/>
+                    </a:lnB>
+                    <a:solidFill>
+                      <a:srgbClr val="F4F6EF"/>
+                    </a:solidFill>
+                  </a:tcPr>
+                </a:tc>
+                <a:tc>
+                  <a:txBody>
+                    <a:bodyPr/>
+                    <a:lstStyle/>
+                    <a:p>
+                      <a:pPr indent="0" marL="0">
+                        <a:buNone/>
+                      </a:pPr>
+                      <a:r>
+                        <a:rPr lang="en-US" sz="1250" dirty="0">
+                          <a:solidFill>
+                            <a:srgbClr val="153C38"/>
+                          </a:solidFill>
+                          <a:latin typeface="Noto Sans CJK JP" pitchFamily="34" charset="0"/>
+                          <a:ea typeface="Noto Sans CJK JP" pitchFamily="34" charset="-122"/>
+                          <a:cs typeface="Noto Sans CJK JP" pitchFamily="34" charset="-120"/>
+                        </a:rPr>
+                        <a:t>Public: 7 neurons + Q-learning</a:t>
+                      </a:r>
+                      <a:endParaRPr lang="en-US" sz="1250" dirty="0">
+                        <a:latin typeface="Noto Sans CJK JP" charset="0"/>
+                        <a:ea typeface="Noto Sans CJK JP" charset="0"/>
+                        <a:cs typeface="Noto Sans CJK JP" charset="0"/>
+                      </a:endParaRPr>
+                    </a:p>
+                    <a:p>
+                      <a:pPr indent="0" marL="0">
+                        <a:buNone/>
+                      </a:pPr>
+                      <a:r>
+                        <a:rPr lang="en-US" sz="1250" dirty="0">
+                          <a:solidFill>
+                            <a:srgbClr val="153C38"/>
+                          </a:solidFill>
+                          <a:latin typeface="Noto Sans CJK JP" pitchFamily="34" charset="0"/>
+                          <a:ea typeface="Noto Sans CJK JP" pitchFamily="34" charset="-122"/>
+                          <a:cs typeface="Noto Sans CJK JP" pitchFamily="34" charset="-120"/>
+                        </a:rPr>
+                        <a:t>Full mode: controls + display</a:t>
+                      </a:r>
+                      <a:endParaRPr lang="en-US" sz="1250" dirty="0">
+                        <a:latin typeface="Noto Sans CJK JP" charset="0"/>
+                        <a:ea typeface="Noto Sans CJK JP" charset="0"/>
+                        <a:cs typeface="Noto Sans CJK JP" charset="0"/>
+                      </a:endParaRPr>
+                    </a:p>
+                  </a:txBody>
+                  <a:tcPr marL="54864" marR="54864" marT="54864" marB="54864" anchor="mid">
+                    <a:lnL w="7620" cap="flat" cmpd="sng" algn="ctr">
+                      <a:solidFill>
+                        <a:srgbClr val="CBD8CE"/>
+                      </a:solidFill>
+                      <a:prstDash val="solid"/>
+                      <a:round/>
+                      <a:headEnd type="none" w="med" len="med"/>
+                      <a:tailEnd type="none" w="med" len="med"/>
+                    </a:lnL>
+                    <a:lnR w="7620" cap="flat" cmpd="sng" algn="ctr">
+                      <a:solidFill>
+                        <a:srgbClr val="CBD8CE"/>
+                      </a:solidFill>
+                      <a:prstDash val="solid"/>
+                      <a:round/>
+                      <a:headEnd type="none" w="med" len="med"/>
+                      <a:tailEnd type="none" w="med" len="med"/>
+                    </a:lnR>
+                    <a:lnT w="7620" cap="flat" cmpd="sng" algn="ctr">
+                      <a:solidFill>
+                        <a:srgbClr val="CBD8CE"/>
+                      </a:solidFill>
+                      <a:prstDash val="solid"/>
+                      <a:round/>
+                      <a:headEnd type="none" w="med" len="med"/>
+                      <a:tailEnd type="none" w="med" len="med"/>
+                    </a:lnT>
+                    <a:lnB w="7620" cap="flat" cmpd="sng" algn="ctr">
+                      <a:solidFill>
+                        <a:srgbClr val="CBD8CE"/>
+                      </a:solidFill>
+                      <a:prstDash val="solid"/>
+                      <a:round/>
+                      <a:headEnd type="none" w="med" len="med"/>
+                      <a:tailEnd type="none" w="med" len="med"/>
+                    </a:lnB>
+                    <a:solidFill>
+                      <a:srgbClr val="F4F6EF"/>
+                    </a:solidFill>
+                  </a:tcPr>
+                </a:tc>
+                <a:tc>
+                  <a:txBody>
+                    <a:bodyPr/>
+                    <a:lstStyle/>
+                    <a:p>
+                      <a:pPr indent="0" marL="0">
+                        <a:buNone/>
+                      </a:pPr>
+                      <a:r>
+                        <a:rPr lang="en-US" sz="1250" dirty="0">
+                          <a:solidFill>
+                            <a:srgbClr val="153C38"/>
+                          </a:solidFill>
+                          <a:latin typeface="Noto Sans CJK JP" pitchFamily="34" charset="0"/>
+                          <a:ea typeface="Noto Sans CJK JP" pitchFamily="34" charset="-122"/>
+                          <a:cs typeface="Noto Sans CJK JP" pitchFamily="34" charset="-120"/>
+                        </a:rPr>
+                        <a:t>HTTP / JSON</a:t>
+                      </a:r>
+                      <a:endParaRPr lang="en-US" sz="1250" dirty="0">
+                        <a:latin typeface="Noto Sans CJK JP" charset="0"/>
+                        <a:ea typeface="Noto Sans CJK JP" charset="0"/>
+                        <a:cs typeface="Noto Sans CJK JP" charset="0"/>
+                      </a:endParaRPr>
+                    </a:p>
+                    <a:p>
+                      <a:pPr indent="0" marL="0">
+                        <a:buNone/>
+                      </a:pPr>
+                      <a:r>
+                        <a:rPr lang="en-US" sz="1250" dirty="0">
+                          <a:solidFill>
+                            <a:srgbClr val="153C38"/>
+                          </a:solidFill>
+                          <a:latin typeface="Noto Sans CJK JP" pitchFamily="34" charset="0"/>
+                          <a:ea typeface="Noto Sans CJK JP" pitchFamily="34" charset="-122"/>
+                          <a:cs typeface="Noto Sans CJK JP" pitchFamily="34" charset="-120"/>
+                        </a:rPr>
+                        <a:t>Verified inputs / view state</a:t>
+                      </a:r>
+                      <a:endParaRPr lang="en-US" sz="1250" dirty="0">
+                        <a:latin typeface="Noto Sans CJK JP" charset="0"/>
+                        <a:ea typeface="Noto Sans CJK JP" charset="0"/>
+                        <a:cs typeface="Noto Sans CJK JP" charset="0"/>
+                      </a:endParaRPr>
+                    </a:p>
+                  </a:txBody>
+                  <a:tcPr marL="54864" marR="54864" marT="54864" marB="54864" anchor="mid">
+                    <a:lnL w="7620" cap="flat" cmpd="sng" algn="ctr">
+                      <a:solidFill>
+                        <a:srgbClr val="CBD8CE"/>
+                      </a:solidFill>
+                      <a:prstDash val="solid"/>
+                      <a:round/>
+                      <a:headEnd type="none" w="med" len="med"/>
+                      <a:tailEnd type="none" w="med" len="med"/>
+                    </a:lnL>
+                    <a:lnR w="7620" cap="flat" cmpd="sng" algn="ctr">
+                      <a:solidFill>
+                        <a:srgbClr val="CBD8CE"/>
+                      </a:solidFill>
+                      <a:prstDash val="solid"/>
+                      <a:round/>
+                      <a:headEnd type="none" w="med" len="med"/>
+                      <a:tailEnd type="none" w="med" len="med"/>
+                    </a:lnR>
+                    <a:lnT w="7620" cap="flat" cmpd="sng" algn="ctr">
+                      <a:solidFill>
+                        <a:srgbClr val="CBD8CE"/>
+                      </a:solidFill>
+                      <a:prstDash val="solid"/>
+                      <a:round/>
+                      <a:headEnd type="none" w="med" len="med"/>
+                      <a:tailEnd type="none" w="med" len="med"/>
+                    </a:lnT>
+                    <a:lnB w="7620" cap="flat" cmpd="sng" algn="ctr">
+                      <a:solidFill>
+                        <a:srgbClr val="CBD8CE"/>
+                      </a:solidFill>
+                      <a:prstDash val="solid"/>
+                      <a:round/>
+                      <a:headEnd type="none" w="med" len="med"/>
+                      <a:tailEnd type="none" w="med" len="med"/>
+                    </a:lnB>
+                    <a:solidFill>
+                      <a:srgbClr val="F4F6EF"/>
+                    </a:solidFill>
+                  </a:tcPr>
+                </a:tc>
+              </a:tr>
+              <a:tr h="521208">
+                <a:tc>
+                  <a:txBody>
+                    <a:bodyPr/>
+                    <a:lstStyle/>
+                    <a:p>
+                      <a:pPr indent="0" marL="0">
+                        <a:buNone/>
+                      </a:pPr>
+                      <a:r>
+                        <a:rPr lang="en-US" sz="1250" dirty="0">
+                          <a:solidFill>
+                            <a:srgbClr val="153C38"/>
+                          </a:solidFill>
+                          <a:latin typeface="Noto Sans CJK JP" pitchFamily="34" charset="0"/>
+                          <a:ea typeface="Noto Sans CJK JP" pitchFamily="34" charset="-122"/>
+                          <a:cs typeface="Noto Sans CJK JP" pitchFamily="34" charset="-120"/>
+                        </a:rPr>
+                        <a:t>Read gateway</a:t>
+                      </a:r>
+                      <a:endParaRPr lang="en-US" sz="1250" dirty="0">
+                        <a:latin typeface="Noto Sans CJK JP" charset="0"/>
+                        <a:ea typeface="Noto Sans CJK JP" charset="0"/>
+                        <a:cs typeface="Noto Sans CJK JP" charset="0"/>
+                      </a:endParaRPr>
+                    </a:p>
+                  </a:txBody>
+                  <a:tcPr marL="54864" marR="54864" marT="54864" marB="54864" anchor="mid">
+                    <a:lnL w="7620" cap="flat" cmpd="sng" algn="ctr">
+                      <a:solidFill>
+                        <a:srgbClr val="CBD8CE"/>
+                      </a:solidFill>
+                      <a:prstDash val="solid"/>
+                      <a:round/>
+                      <a:headEnd type="none" w="med" len="med"/>
+                      <a:tailEnd type="none" w="med" len="med"/>
+                    </a:lnL>
+                    <a:lnR w="7620" cap="flat" cmpd="sng" algn="ctr">
+                      <a:solidFill>
+                        <a:srgbClr val="CBD8CE"/>
+                      </a:solidFill>
+                      <a:prstDash val="solid"/>
+                      <a:round/>
+                      <a:headEnd type="none" w="med" len="med"/>
+                      <a:tailEnd type="none" w="med" len="med"/>
+                    </a:lnR>
+                    <a:lnT w="7620" cap="flat" cmpd="sng" algn="ctr">
+                      <a:solidFill>
+                        <a:srgbClr val="CBD8CE"/>
+                      </a:solidFill>
+                      <a:prstDash val="solid"/>
+                      <a:round/>
+                      <a:headEnd type="none" w="med" len="med"/>
+                      <a:tailEnd type="none" w="med" len="med"/>
+                    </a:lnT>
+                    <a:lnB w="7620" cap="flat" cmpd="sng" algn="ctr">
+                      <a:solidFill>
+                        <a:srgbClr val="CBD8CE"/>
+                      </a:solidFill>
+                      <a:prstDash val="solid"/>
+                      <a:round/>
+                      <a:headEnd type="none" w="med" len="med"/>
+                      <a:tailEnd type="none" w="med" len="med"/>
+                    </a:lnB>
+                    <a:solidFill>
+                      <a:srgbClr val="F4F6EF"/>
+                    </a:solidFill>
+                  </a:tcPr>
+                </a:tc>
+                <a:tc>
+                  <a:txBody>
+                    <a:bodyPr/>
+                    <a:lstStyle/>
+                    <a:p>
+                      <a:pPr indent="0" marL="0">
+                        <a:buNone/>
+                      </a:pPr>
+                      <a:r>
+                        <a:rPr lang="en-US" sz="1250" dirty="0">
+                          <a:solidFill>
+                            <a:srgbClr val="153C38"/>
+                          </a:solidFill>
+                          <a:latin typeface="Noto Sans CJK JP" pitchFamily="34" charset="0"/>
+                          <a:ea typeface="Noto Sans CJK JP" pitchFamily="34" charset="-122"/>
+                          <a:cs typeface="Noto Sans CJK JP" pitchFamily="34" charset="-120"/>
+                        </a:rPr>
+                        <a:t>JavaScript</a:t>
+                      </a:r>
+                      <a:endParaRPr lang="en-US" sz="1250" dirty="0">
+                        <a:latin typeface="Noto Sans CJK JP" charset="0"/>
+                        <a:ea typeface="Noto Sans CJK JP" charset="0"/>
+                        <a:cs typeface="Noto Sans CJK JP" charset="0"/>
+                      </a:endParaRPr>
+                    </a:p>
+                    <a:p>
+                      <a:pPr indent="0" marL="0">
+                        <a:buNone/>
+                      </a:pPr>
+                      <a:r>
+                        <a:rPr lang="en-US" sz="1250" dirty="0">
+                          <a:solidFill>
+                            <a:srgbClr val="153C38"/>
+                          </a:solidFill>
+                          <a:latin typeface="Noto Sans CJK JP" pitchFamily="34" charset="0"/>
+                          <a:ea typeface="Noto Sans CJK JP" pitchFamily="34" charset="-122"/>
+                          <a:cs typeface="Noto Sans CJK JP" pitchFamily="34" charset="-120"/>
+                        </a:rPr>
+                        <a:t>Cloudflare Workers</a:t>
+                      </a:r>
+                      <a:endParaRPr lang="en-US" sz="1250" dirty="0">
+                        <a:latin typeface="Noto Sans CJK JP" charset="0"/>
+                        <a:ea typeface="Noto Sans CJK JP" charset="0"/>
+                        <a:cs typeface="Noto Sans CJK JP" charset="0"/>
+                      </a:endParaRPr>
+                    </a:p>
+                  </a:txBody>
+                  <a:tcPr marL="54864" marR="54864" marT="54864" marB="54864" anchor="mid">
+                    <a:lnL w="7620" cap="flat" cmpd="sng" algn="ctr">
+                      <a:solidFill>
+                        <a:srgbClr val="CBD8CE"/>
+                      </a:solidFill>
+                      <a:prstDash val="solid"/>
+                      <a:round/>
+                      <a:headEnd type="none" w="med" len="med"/>
+                      <a:tailEnd type="none" w="med" len="med"/>
+                    </a:lnL>
+                    <a:lnR w="7620" cap="flat" cmpd="sng" algn="ctr">
+                      <a:solidFill>
+                        <a:srgbClr val="CBD8CE"/>
+                      </a:solidFill>
+                      <a:prstDash val="solid"/>
+                      <a:round/>
+                      <a:headEnd type="none" w="med" len="med"/>
+                      <a:tailEnd type="none" w="med" len="med"/>
+                    </a:lnR>
+                    <a:lnT w="7620" cap="flat" cmpd="sng" algn="ctr">
+                      <a:solidFill>
+                        <a:srgbClr val="CBD8CE"/>
+                      </a:solidFill>
+                      <a:prstDash val="solid"/>
+                      <a:round/>
+                      <a:headEnd type="none" w="med" len="med"/>
+                      <a:tailEnd type="none" w="med" len="med"/>
+                    </a:lnT>
+                    <a:lnB w="7620" cap="flat" cmpd="sng" algn="ctr">
+                      <a:solidFill>
+                        <a:srgbClr val="CBD8CE"/>
+                      </a:solidFill>
+                      <a:prstDash val="solid"/>
+                      <a:round/>
+                      <a:headEnd type="none" w="med" len="med"/>
+                      <a:tailEnd type="none" w="med" len="med"/>
+                    </a:lnB>
+                    <a:solidFill>
+                      <a:srgbClr val="F4F6EF"/>
+                    </a:solidFill>
+                  </a:tcPr>
+                </a:tc>
+                <a:tc>
+                  <a:txBody>
+                    <a:bodyPr/>
+                    <a:lstStyle/>
+                    <a:p>
+                      <a:pPr indent="0" marL="0">
+                        <a:buNone/>
+                      </a:pPr>
+                      <a:r>
+                        <a:rPr lang="en-US" sz="1250" dirty="0">
+                          <a:solidFill>
+                            <a:srgbClr val="153C38"/>
+                          </a:solidFill>
+                          <a:latin typeface="Noto Sans CJK JP" pitchFamily="34" charset="0"/>
+                          <a:ea typeface="Noto Sans CJK JP" pitchFamily="34" charset="-122"/>
+                          <a:cs typeface="Noto Sans CJK JP" pitchFamily="34" charset="-120"/>
+                        </a:rPr>
+                        <a:t>Verify receipts and events</a:t>
+                      </a:r>
+                      <a:endParaRPr lang="en-US" sz="1250" dirty="0">
+                        <a:latin typeface="Noto Sans CJK JP" charset="0"/>
+                        <a:ea typeface="Noto Sans CJK JP" charset="0"/>
+                        <a:cs typeface="Noto Sans CJK JP" charset="0"/>
+                      </a:endParaRPr>
+                    </a:p>
+                    <a:p>
+                      <a:pPr indent="0" marL="0">
+                        <a:buNone/>
+                      </a:pPr>
+                      <a:r>
+                        <a:rPr lang="en-US" sz="1250" dirty="0">
+                          <a:solidFill>
+                            <a:srgbClr val="153C38"/>
+                          </a:solidFill>
+                          <a:latin typeface="Noto Sans CJK JP" pitchFamily="34" charset="0"/>
+                          <a:ea typeface="Noto Sans CJK JP" pitchFamily="34" charset="-122"/>
+                          <a:cs typeface="Noto Sans CJK JP" pitchFamily="34" charset="-120"/>
+                        </a:rPr>
+                        <a:t>Anvil shares the read logic</a:t>
+                      </a:r>
+                      <a:endParaRPr lang="en-US" sz="1250" dirty="0">
+                        <a:latin typeface="Noto Sans CJK JP" charset="0"/>
+                        <a:ea typeface="Noto Sans CJK JP" charset="0"/>
+                        <a:cs typeface="Noto Sans CJK JP" charset="0"/>
+                      </a:endParaRPr>
+                    </a:p>
+                  </a:txBody>
+                  <a:tcPr marL="54864" marR="54864" marT="54864" marB="54864" anchor="mid">
+                    <a:lnL w="7620" cap="flat" cmpd="sng" algn="ctr">
+                      <a:solidFill>
+                        <a:srgbClr val="CBD8CE"/>
+                      </a:solidFill>
+                      <a:prstDash val="solid"/>
+                      <a:round/>
+                      <a:headEnd type="none" w="med" len="med"/>
+                      <a:tailEnd type="none" w="med" len="med"/>
+                    </a:lnL>
+                    <a:lnR w="7620" cap="flat" cmpd="sng" algn="ctr">
+                      <a:solidFill>
+                        <a:srgbClr val="CBD8CE"/>
+                      </a:solidFill>
+                      <a:prstDash val="solid"/>
+                      <a:round/>
+                      <a:headEnd type="none" w="med" len="med"/>
+                      <a:tailEnd type="none" w="med" len="med"/>
+                    </a:lnR>
+                    <a:lnT w="7620" cap="flat" cmpd="sng" algn="ctr">
+                      <a:solidFill>
+                        <a:srgbClr val="CBD8CE"/>
+                      </a:solidFill>
+                      <a:prstDash val="solid"/>
+                      <a:round/>
+                      <a:headEnd type="none" w="med" len="med"/>
+                      <a:tailEnd type="none" w="med" len="med"/>
+                    </a:lnT>
+                    <a:lnB w="7620" cap="flat" cmpd="sng" algn="ctr">
+                      <a:solidFill>
+                        <a:srgbClr val="CBD8CE"/>
+                      </a:solidFill>
+                      <a:prstDash val="solid"/>
+                      <a:round/>
+                      <a:headEnd type="none" w="med" len="med"/>
+                      <a:tailEnd type="none" w="med" len="med"/>
+                    </a:lnB>
+                    <a:solidFill>
+                      <a:srgbClr val="F4F6EF"/>
+                    </a:solidFill>
+                  </a:tcPr>
+                </a:tc>
+                <a:tc>
+                  <a:txBody>
+                    <a:bodyPr/>
+                    <a:lstStyle/>
+                    <a:p>
+                      <a:pPr indent="0" marL="0">
+                        <a:buNone/>
+                      </a:pPr>
+                      <a:r>
+                        <a:rPr lang="en-US" sz="1250" dirty="0">
+                          <a:solidFill>
+                            <a:srgbClr val="153C38"/>
+                          </a:solidFill>
+                          <a:latin typeface="Noto Sans CJK JP" pitchFamily="34" charset="0"/>
+                          <a:ea typeface="Noto Sans CJK JP" pitchFamily="34" charset="-122"/>
+                          <a:cs typeface="Noto Sans CJK JP" pitchFamily="34" charset="-120"/>
+                        </a:rPr>
+                        <a:t>JSON-RPC</a:t>
+                      </a:r>
+                      <a:endParaRPr lang="en-US" sz="1250" dirty="0">
+                        <a:latin typeface="Noto Sans CJK JP" charset="0"/>
+                        <a:ea typeface="Noto Sans CJK JP" charset="0"/>
+                        <a:cs typeface="Noto Sans CJK JP" charset="0"/>
+                      </a:endParaRPr>
+                    </a:p>
+                    <a:p>
+                      <a:pPr indent="0" marL="0">
+                        <a:buNone/>
+                      </a:pPr>
+                      <a:r>
+                        <a:rPr lang="en-US" sz="1250" dirty="0">
+                          <a:solidFill>
+                            <a:srgbClr val="153C38"/>
+                          </a:solidFill>
+                          <a:latin typeface="Noto Sans CJK JP" pitchFamily="34" charset="0"/>
+                          <a:ea typeface="Noto Sans CJK JP" pitchFamily="34" charset="-122"/>
+                          <a:cs typeface="Noto Sans CJK JP" pitchFamily="34" charset="-120"/>
+                        </a:rPr>
+                        <a:t>Blocks, logs, receipts</a:t>
+                      </a:r>
+                      <a:endParaRPr lang="en-US" sz="1250" dirty="0">
+                        <a:latin typeface="Noto Sans CJK JP" charset="0"/>
+                        <a:ea typeface="Noto Sans CJK JP" charset="0"/>
+                        <a:cs typeface="Noto Sans CJK JP" charset="0"/>
+                      </a:endParaRPr>
+                    </a:p>
+                  </a:txBody>
+                  <a:tcPr marL="54864" marR="54864" marT="54864" marB="54864" anchor="mid">
+                    <a:lnL w="7620" cap="flat" cmpd="sng" algn="ctr">
+                      <a:solidFill>
+                        <a:srgbClr val="CBD8CE"/>
+                      </a:solidFill>
+                      <a:prstDash val="solid"/>
+                      <a:round/>
+                      <a:headEnd type="none" w="med" len="med"/>
+                      <a:tailEnd type="none" w="med" len="med"/>
+                    </a:lnL>
+                    <a:lnR w="7620" cap="flat" cmpd="sng" algn="ctr">
+                      <a:solidFill>
+                        <a:srgbClr val="CBD8CE"/>
+                      </a:solidFill>
+                      <a:prstDash val="solid"/>
+                      <a:round/>
+                      <a:headEnd type="none" w="med" len="med"/>
+                      <a:tailEnd type="none" w="med" len="med"/>
+                    </a:lnR>
+                    <a:lnT w="7620" cap="flat" cmpd="sng" algn="ctr">
+                      <a:solidFill>
+                        <a:srgbClr val="CBD8CE"/>
+                      </a:solidFill>
+                      <a:prstDash val="solid"/>
+                      <a:round/>
+                      <a:headEnd type="none" w="med" len="med"/>
+                      <a:tailEnd type="none" w="med" len="med"/>
+                    </a:lnT>
+                    <a:lnB w="7620" cap="flat" cmpd="sng" algn="ctr">
+                      <a:solidFill>
+                        <a:srgbClr val="CBD8CE"/>
+                      </a:solidFill>
+                      <a:prstDash val="solid"/>
+                      <a:round/>
+                      <a:headEnd type="none" w="med" len="med"/>
+                      <a:tailEnd type="none" w="med" len="med"/>
+                    </a:lnB>
+                    <a:solidFill>
+                      <a:srgbClr val="F4F6EF"/>
+                    </a:solidFill>
+                  </a:tcPr>
+                </a:tc>
+              </a:tr>
+              <a:tr h="521208">
+                <a:tc>
+                  <a:txBody>
+                    <a:bodyPr/>
+                    <a:lstStyle/>
+                    <a:p>
+                      <a:pPr indent="0" marL="0">
+                        <a:buNone/>
+                      </a:pPr>
+                      <a:r>
+                        <a:rPr lang="en-US" sz="1250" dirty="0">
+                          <a:solidFill>
+                            <a:srgbClr val="153C38"/>
+                          </a:solidFill>
+                          <a:latin typeface="Noto Sans CJK JP" pitchFamily="34" charset="0"/>
+                          <a:ea typeface="Noto Sans CJK JP" pitchFamily="34" charset="-122"/>
+                          <a:cs typeface="Noto Sans CJK JP" pitchFamily="34" charset="-120"/>
+                        </a:rPr>
+                        <a:t>Signer</a:t>
+                      </a:r>
+                      <a:endParaRPr lang="en-US" sz="1250" dirty="0">
+                        <a:latin typeface="Noto Sans CJK JP" charset="0"/>
+                        <a:ea typeface="Noto Sans CJK JP" charset="0"/>
+                        <a:cs typeface="Noto Sans CJK JP" charset="0"/>
+                      </a:endParaRPr>
+                    </a:p>
+                  </a:txBody>
+                  <a:tcPr marL="54864" marR="54864" marT="54864" marB="54864" anchor="mid">
+                    <a:lnL w="7620" cap="flat" cmpd="sng" algn="ctr">
+                      <a:solidFill>
+                        <a:srgbClr val="CBD8CE"/>
+                      </a:solidFill>
+                      <a:prstDash val="solid"/>
+                      <a:round/>
+                      <a:headEnd type="none" w="med" len="med"/>
+                      <a:tailEnd type="none" w="med" len="med"/>
+                    </a:lnL>
+                    <a:lnR w="7620" cap="flat" cmpd="sng" algn="ctr">
+                      <a:solidFill>
+                        <a:srgbClr val="CBD8CE"/>
+                      </a:solidFill>
+                      <a:prstDash val="solid"/>
+                      <a:round/>
+                      <a:headEnd type="none" w="med" len="med"/>
+                      <a:tailEnd type="none" w="med" len="med"/>
+                    </a:lnR>
+                    <a:lnT w="7620" cap="flat" cmpd="sng" algn="ctr">
+                      <a:solidFill>
+                        <a:srgbClr val="CBD8CE"/>
+                      </a:solidFill>
+                      <a:prstDash val="solid"/>
+                      <a:round/>
+                      <a:headEnd type="none" w="med" len="med"/>
+                      <a:tailEnd type="none" w="med" len="med"/>
+                    </a:lnT>
+                    <a:lnB w="7620" cap="flat" cmpd="sng" algn="ctr">
+                      <a:solidFill>
+                        <a:srgbClr val="CBD8CE"/>
+                      </a:solidFill>
+                      <a:prstDash val="solid"/>
+                      <a:round/>
+                      <a:headEnd type="none" w="med" len="med"/>
+                      <a:tailEnd type="none" w="med" len="med"/>
+                    </a:lnB>
+                    <a:solidFill>
+                      <a:srgbClr val="F4F6EF"/>
+                    </a:solidFill>
+                  </a:tcPr>
+                </a:tc>
+                <a:tc>
+                  <a:txBody>
+                    <a:bodyPr/>
+                    <a:lstStyle/>
+                    <a:p>
+                      <a:pPr indent="0" marL="0">
+                        <a:buNone/>
+                      </a:pPr>
+                      <a:r>
+                        <a:rPr lang="en-US" sz="1250" dirty="0">
+                          <a:solidFill>
+                            <a:srgbClr val="153C38"/>
+                          </a:solidFill>
+                          <a:latin typeface="Noto Sans CJK JP" pitchFamily="34" charset="0"/>
+                          <a:ea typeface="Noto Sans CJK JP" pitchFamily="34" charset="-122"/>
+                          <a:cs typeface="Noto Sans CJK JP" pitchFamily="34" charset="-120"/>
+                        </a:rPr>
+                        <a:t>JavaScript + ethers</a:t>
+                      </a:r>
+                      <a:endParaRPr lang="en-US" sz="1250" dirty="0">
+                        <a:latin typeface="Noto Sans CJK JP" charset="0"/>
+                        <a:ea typeface="Noto Sans CJK JP" charset="0"/>
+                        <a:cs typeface="Noto Sans CJK JP" charset="0"/>
+                      </a:endParaRPr>
+                    </a:p>
+                    <a:p>
+                      <a:pPr indent="0" marL="0">
+                        <a:buNone/>
+                      </a:pPr>
+                      <a:r>
+                        <a:rPr lang="en-US" sz="1250" dirty="0">
+                          <a:solidFill>
+                            <a:srgbClr val="153C38"/>
+                          </a:solidFill>
+                          <a:latin typeface="Noto Sans CJK JP" pitchFamily="34" charset="0"/>
+                          <a:ea typeface="Noto Sans CJK JP" pitchFamily="34" charset="-122"/>
+                          <a:cs typeface="Noto Sans CJK JP" pitchFamily="34" charset="-120"/>
+                        </a:rPr>
+                        <a:t>Worker / wallet / Anvil</a:t>
+                      </a:r>
+                      <a:endParaRPr lang="en-US" sz="1250" dirty="0">
+                        <a:latin typeface="Noto Sans CJK JP" charset="0"/>
+                        <a:ea typeface="Noto Sans CJK JP" charset="0"/>
+                        <a:cs typeface="Noto Sans CJK JP" charset="0"/>
+                      </a:endParaRPr>
+                    </a:p>
+                  </a:txBody>
+                  <a:tcPr marL="54864" marR="54864" marT="54864" marB="54864" anchor="mid">
+                    <a:lnL w="7620" cap="flat" cmpd="sng" algn="ctr">
+                      <a:solidFill>
+                        <a:srgbClr val="CBD8CE"/>
+                      </a:solidFill>
+                      <a:prstDash val="solid"/>
+                      <a:round/>
+                      <a:headEnd type="none" w="med" len="med"/>
+                      <a:tailEnd type="none" w="med" len="med"/>
+                    </a:lnL>
+                    <a:lnR w="7620" cap="flat" cmpd="sng" algn="ctr">
+                      <a:solidFill>
+                        <a:srgbClr val="CBD8CE"/>
+                      </a:solidFill>
+                      <a:prstDash val="solid"/>
+                      <a:round/>
+                      <a:headEnd type="none" w="med" len="med"/>
+                      <a:tailEnd type="none" w="med" len="med"/>
+                    </a:lnR>
+                    <a:lnT w="7620" cap="flat" cmpd="sng" algn="ctr">
+                      <a:solidFill>
+                        <a:srgbClr val="CBD8CE"/>
+                      </a:solidFill>
+                      <a:prstDash val="solid"/>
+                      <a:round/>
+                      <a:headEnd type="none" w="med" len="med"/>
+                      <a:tailEnd type="none" w="med" len="med"/>
+                    </a:lnT>
+                    <a:lnB w="7620" cap="flat" cmpd="sng" algn="ctr">
+                      <a:solidFill>
+                        <a:srgbClr val="CBD8CE"/>
+                      </a:solidFill>
+                      <a:prstDash val="solid"/>
+                      <a:round/>
+                      <a:headEnd type="none" w="med" len="med"/>
+                      <a:tailEnd type="none" w="med" len="med"/>
+                    </a:lnB>
+                    <a:solidFill>
+                      <a:srgbClr val="F4F6EF"/>
+                    </a:solidFill>
+                  </a:tcPr>
+                </a:tc>
+                <a:tc>
+                  <a:txBody>
+                    <a:bodyPr/>
+                    <a:lstStyle/>
+                    <a:p>
+                      <a:pPr indent="0" marL="0">
+                        <a:buNone/>
+                      </a:pPr>
+                      <a:r>
+                        <a:rPr lang="en-US" sz="1250" dirty="0">
+                          <a:solidFill>
+                            <a:srgbClr val="153C38"/>
+                          </a:solidFill>
+                          <a:latin typeface="Noto Sans CJK JP" pitchFamily="34" charset="0"/>
+                          <a:ea typeface="Noto Sans CJK JP" pitchFamily="34" charset="-122"/>
+                          <a:cs typeface="Noto Sans CJK JP" pitchFamily="34" charset="-120"/>
+                        </a:rPr>
+                        <a:t>Owner-authorized TXs</a:t>
+                      </a:r>
+                      <a:endParaRPr lang="en-US" sz="1250" dirty="0">
+                        <a:latin typeface="Noto Sans CJK JP" charset="0"/>
+                        <a:ea typeface="Noto Sans CJK JP" charset="0"/>
+                        <a:cs typeface="Noto Sans CJK JP" charset="0"/>
+                      </a:endParaRPr>
+                    </a:p>
+                    <a:p>
+                      <a:pPr indent="0" marL="0">
+                        <a:buNone/>
+                      </a:pPr>
+                      <a:r>
+                        <a:rPr lang="en-US" sz="1250" dirty="0">
+                          <a:solidFill>
+                            <a:srgbClr val="153C38"/>
+                          </a:solidFill>
+                          <a:latin typeface="Noto Sans CJK JP" pitchFamily="34" charset="0"/>
+                          <a:ea typeface="Noto Sans CJK JP" pitchFamily="34" charset="-122"/>
+                          <a:cs typeface="Noto Sans CJK JP" pitchFamily="34" charset="-120"/>
+                        </a:rPr>
+                        <a:t>Budget-capped scheduled sends</a:t>
+                      </a:r>
+                      <a:endParaRPr lang="en-US" sz="1250" dirty="0">
+                        <a:latin typeface="Noto Sans CJK JP" charset="0"/>
+                        <a:ea typeface="Noto Sans CJK JP" charset="0"/>
+                        <a:cs typeface="Noto Sans CJK JP" charset="0"/>
+                      </a:endParaRPr>
+                    </a:p>
+                  </a:txBody>
+                  <a:tcPr marL="54864" marR="54864" marT="54864" marB="54864" anchor="mid">
+                    <a:lnL w="7620" cap="flat" cmpd="sng" algn="ctr">
+                      <a:solidFill>
+                        <a:srgbClr val="CBD8CE"/>
+                      </a:solidFill>
+                      <a:prstDash val="solid"/>
+                      <a:round/>
+                      <a:headEnd type="none" w="med" len="med"/>
+                      <a:tailEnd type="none" w="med" len="med"/>
+                    </a:lnL>
+                    <a:lnR w="7620" cap="flat" cmpd="sng" algn="ctr">
+                      <a:solidFill>
+                        <a:srgbClr val="CBD8CE"/>
+                      </a:solidFill>
+                      <a:prstDash val="solid"/>
+                      <a:round/>
+                      <a:headEnd type="none" w="med" len="med"/>
+                      <a:tailEnd type="none" w="med" len="med"/>
+                    </a:lnR>
+                    <a:lnT w="7620" cap="flat" cmpd="sng" algn="ctr">
+                      <a:solidFill>
+                        <a:srgbClr val="CBD8CE"/>
+                      </a:solidFill>
+                      <a:prstDash val="solid"/>
+                      <a:round/>
+                      <a:headEnd type="none" w="med" len="med"/>
+                      <a:tailEnd type="none" w="med" len="med"/>
+                    </a:lnT>
+                    <a:lnB w="7620" cap="flat" cmpd="sng" algn="ctr">
+                      <a:solidFill>
+                        <a:srgbClr val="CBD8CE"/>
+                      </a:solidFill>
+                      <a:prstDash val="solid"/>
+                      <a:round/>
+                      <a:headEnd type="none" w="med" len="med"/>
+                      <a:tailEnd type="none" w="med" len="med"/>
+                    </a:lnB>
+                    <a:solidFill>
+                      <a:srgbClr val="F4F6EF"/>
+                    </a:solidFill>
+                  </a:tcPr>
+                </a:tc>
+                <a:tc>
+                  <a:txBody>
+                    <a:bodyPr/>
+                    <a:lstStyle/>
+                    <a:p>
+                      <a:pPr indent="0" marL="0">
+                        <a:buNone/>
+                      </a:pPr>
+                      <a:r>
+                        <a:rPr lang="en-US" sz="1250" dirty="0">
+                          <a:solidFill>
+                            <a:srgbClr val="153C38"/>
+                          </a:solidFill>
+                          <a:latin typeface="Noto Sans CJK JP" pitchFamily="34" charset="0"/>
+                          <a:ea typeface="Noto Sans CJK JP" pitchFamily="34" charset="-122"/>
+                          <a:cs typeface="Noto Sans CJK JP" pitchFamily="34" charset="-120"/>
+                        </a:rPr>
+                        <a:t>ABI / signed TXs</a:t>
+                      </a:r>
+                      <a:endParaRPr lang="en-US" sz="1250" dirty="0">
+                        <a:latin typeface="Noto Sans CJK JP" charset="0"/>
+                        <a:ea typeface="Noto Sans CJK JP" charset="0"/>
+                        <a:cs typeface="Noto Sans CJK JP" charset="0"/>
+                      </a:endParaRPr>
+                    </a:p>
+                    <a:p>
+                      <a:pPr indent="0" marL="0">
+                        <a:buNone/>
+                      </a:pPr>
+                      <a:r>
+                        <a:rPr lang="en-US" sz="1250" dirty="0">
+                          <a:solidFill>
+                            <a:srgbClr val="153C38"/>
+                          </a:solidFill>
+                          <a:latin typeface="Noto Sans CJK JP" pitchFamily="34" charset="0"/>
+                          <a:ea typeface="Noto Sans CJK JP" pitchFamily="34" charset="-122"/>
+                          <a:cs typeface="Noto Sans CJK JP" pitchFamily="34" charset="-120"/>
+                        </a:rPr>
+                        <a:t>No server key returned to UI</a:t>
+                      </a:r>
+                      <a:endParaRPr lang="en-US" sz="1250" dirty="0">
+                        <a:latin typeface="Noto Sans CJK JP" charset="0"/>
+                        <a:ea typeface="Noto Sans CJK JP" charset="0"/>
+                        <a:cs typeface="Noto Sans CJK JP" charset="0"/>
+                      </a:endParaRPr>
+                    </a:p>
+                  </a:txBody>
+                  <a:tcPr marL="54864" marR="54864" marT="54864" marB="54864" anchor="mid">
+                    <a:lnL w="7620" cap="flat" cmpd="sng" algn="ctr">
+                      <a:solidFill>
+                        <a:srgbClr val="CBD8CE"/>
+                      </a:solidFill>
+                      <a:prstDash val="solid"/>
+                      <a:round/>
+                      <a:headEnd type="none" w="med" len="med"/>
+                      <a:tailEnd type="none" w="med" len="med"/>
+                    </a:lnL>
+                    <a:lnR w="7620" cap="flat" cmpd="sng" algn="ctr">
+                      <a:solidFill>
+                        <a:srgbClr val="CBD8CE"/>
+                      </a:solidFill>
+                      <a:prstDash val="solid"/>
+                      <a:round/>
+                      <a:headEnd type="none" w="med" len="med"/>
+                      <a:tailEnd type="none" w="med" len="med"/>
+                    </a:lnR>
+                    <a:lnT w="7620" cap="flat" cmpd="sng" algn="ctr">
+                      <a:solidFill>
+                        <a:srgbClr val="CBD8CE"/>
+                      </a:solidFill>
+                      <a:prstDash val="solid"/>
+                      <a:round/>
+                      <a:headEnd type="none" w="med" len="med"/>
+                      <a:tailEnd type="none" w="med" len="med"/>
+                    </a:lnT>
+                    <a:lnB w="7620" cap="flat" cmpd="sng" algn="ctr">
+                      <a:solidFill>
+                        <a:srgbClr val="CBD8CE"/>
+                      </a:solidFill>
+                      <a:prstDash val="solid"/>
+                      <a:round/>
+                      <a:headEnd type="none" w="med" len="med"/>
+                      <a:tailEnd type="none" w="med" len="med"/>
+                    </a:lnB>
+                    <a:solidFill>
+                      <a:srgbClr val="F4F6EF"/>
+                    </a:solidFill>
+                  </a:tcPr>
+                </a:tc>
+              </a:tr>
+              <a:tr h="521208">
+                <a:tc>
+                  <a:txBody>
+                    <a:bodyPr/>
+                    <a:lstStyle/>
+                    <a:p>
+                      <a:pPr indent="0" marL="0">
+                        <a:buNone/>
+                      </a:pPr>
+                      <a:r>
+                        <a:rPr lang="en-US" sz="1250" dirty="0">
+                          <a:solidFill>
+                            <a:srgbClr val="153C38"/>
+                          </a:solidFill>
+                          <a:latin typeface="Noto Sans CJK JP" pitchFamily="34" charset="0"/>
+                          <a:ea typeface="Noto Sans CJK JP" pitchFamily="34" charset="-122"/>
+                          <a:cs typeface="Noto Sans CJK JP" pitchFamily="34" charset="-120"/>
+                        </a:rPr>
+                        <a:t>Local controller</a:t>
+                      </a:r>
+                      <a:endParaRPr lang="en-US" sz="1250" dirty="0">
+                        <a:latin typeface="Noto Sans CJK JP" charset="0"/>
+                        <a:ea typeface="Noto Sans CJK JP" charset="0"/>
+                        <a:cs typeface="Noto Sans CJK JP" charset="0"/>
+                      </a:endParaRPr>
+                    </a:p>
+                  </a:txBody>
+                  <a:tcPr marL="54864" marR="54864" marT="54864" marB="54864" anchor="mid">
+                    <a:lnL w="7620" cap="flat" cmpd="sng" algn="ctr">
+                      <a:solidFill>
+                        <a:srgbClr val="CBD8CE"/>
+                      </a:solidFill>
+                      <a:prstDash val="solid"/>
+                      <a:round/>
+                      <a:headEnd type="none" w="med" len="med"/>
+                      <a:tailEnd type="none" w="med" len="med"/>
+                    </a:lnL>
+                    <a:lnR w="7620" cap="flat" cmpd="sng" algn="ctr">
+                      <a:solidFill>
+                        <a:srgbClr val="CBD8CE"/>
+                      </a:solidFill>
+                      <a:prstDash val="solid"/>
+                      <a:round/>
+                      <a:headEnd type="none" w="med" len="med"/>
+                      <a:tailEnd type="none" w="med" len="med"/>
+                    </a:lnR>
+                    <a:lnT w="7620" cap="flat" cmpd="sng" algn="ctr">
+                      <a:solidFill>
+                        <a:srgbClr val="CBD8CE"/>
+                      </a:solidFill>
+                      <a:prstDash val="solid"/>
+                      <a:round/>
+                      <a:headEnd type="none" w="med" len="med"/>
+                      <a:tailEnd type="none" w="med" len="med"/>
+                    </a:lnT>
+                    <a:lnB w="7620" cap="flat" cmpd="sng" algn="ctr">
+                      <a:solidFill>
+                        <a:srgbClr val="CBD8CE"/>
+                      </a:solidFill>
+                      <a:prstDash val="solid"/>
+                      <a:round/>
+                      <a:headEnd type="none" w="med" len="med"/>
+                      <a:tailEnd type="none" w="med" len="med"/>
+                    </a:lnB>
+                    <a:solidFill>
+                      <a:srgbClr val="F4F6EF"/>
+                    </a:solidFill>
+                  </a:tcPr>
+                </a:tc>
+                <a:tc>
+                  <a:txBody>
+                    <a:bodyPr/>
+                    <a:lstStyle/>
+                    <a:p>
+                      <a:pPr indent="0" marL="0">
+                        <a:buNone/>
+                      </a:pPr>
+                      <a:r>
+                        <a:rPr lang="en-US" sz="1250" dirty="0">
+                          <a:solidFill>
+                            <a:srgbClr val="153C38"/>
+                          </a:solidFill>
+                          <a:latin typeface="Noto Sans CJK JP" pitchFamily="34" charset="0"/>
+                          <a:ea typeface="Noto Sans CJK JP" pitchFamily="34" charset="-122"/>
+                          <a:cs typeface="Noto Sans CJK JP" pitchFamily="34" charset="-120"/>
+                        </a:rPr>
+                        <a:t>JavaScript / Node.js</a:t>
+                      </a:r>
+                      <a:endParaRPr lang="en-US" sz="1250" dirty="0">
+                        <a:latin typeface="Noto Sans CJK JP" charset="0"/>
+                        <a:ea typeface="Noto Sans CJK JP" charset="0"/>
+                        <a:cs typeface="Noto Sans CJK JP" charset="0"/>
+                      </a:endParaRPr>
+                    </a:p>
+                  </a:txBody>
+                  <a:tcPr marL="54864" marR="54864" marT="54864" marB="54864" anchor="mid">
+                    <a:lnL w="7620" cap="flat" cmpd="sng" algn="ctr">
+                      <a:solidFill>
+                        <a:srgbClr val="CBD8CE"/>
+                      </a:solidFill>
+                      <a:prstDash val="solid"/>
+                      <a:round/>
+                      <a:headEnd type="none" w="med" len="med"/>
+                      <a:tailEnd type="none" w="med" len="med"/>
+                    </a:lnL>
+                    <a:lnR w="7620" cap="flat" cmpd="sng" algn="ctr">
+                      <a:solidFill>
+                        <a:srgbClr val="CBD8CE"/>
+                      </a:solidFill>
+                      <a:prstDash val="solid"/>
+                      <a:round/>
+                      <a:headEnd type="none" w="med" len="med"/>
+                      <a:tailEnd type="none" w="med" len="med"/>
+                    </a:lnR>
+                    <a:lnT w="7620" cap="flat" cmpd="sng" algn="ctr">
+                      <a:solidFill>
+                        <a:srgbClr val="CBD8CE"/>
+                      </a:solidFill>
+                      <a:prstDash val="solid"/>
+                      <a:round/>
+                      <a:headEnd type="none" w="med" len="med"/>
+                      <a:tailEnd type="none" w="med" len="med"/>
+                    </a:lnT>
+                    <a:lnB w="7620" cap="flat" cmpd="sng" algn="ctr">
+                      <a:solidFill>
+                        <a:srgbClr val="CBD8CE"/>
+                      </a:solidFill>
+                      <a:prstDash val="solid"/>
+                      <a:round/>
+                      <a:headEnd type="none" w="med" len="med"/>
+                      <a:tailEnd type="none" w="med" len="med"/>
+                    </a:lnB>
+                    <a:solidFill>
+                      <a:srgbClr val="F4F6EF"/>
+                    </a:solidFill>
+                  </a:tcPr>
+                </a:tc>
+                <a:tc>
+                  <a:txBody>
+                    <a:bodyPr/>
+                    <a:lstStyle/>
+                    <a:p>
+                      <a:pPr indent="0" marL="0">
+                        <a:buNone/>
+                      </a:pPr>
+                      <a:r>
+                        <a:rPr lang="en-US" sz="1250" dirty="0">
+                          <a:solidFill>
+                            <a:srgbClr val="153C38"/>
+                          </a:solidFill>
+                          <a:latin typeface="Noto Sans CJK JP" pitchFamily="34" charset="0"/>
+                          <a:ea typeface="Noto Sans CJK JP" pitchFamily="34" charset="-122"/>
+                          <a:cs typeface="Noto Sans CJK JP" pitchFamily="34" charset="-120"/>
+                        </a:rPr>
+                        <a:t>Full world, rewards, execution</a:t>
+                      </a:r>
+                      <a:endParaRPr lang="en-US" sz="1250" dirty="0">
+                        <a:latin typeface="Noto Sans CJK JP" charset="0"/>
+                        <a:ea typeface="Noto Sans CJK JP" charset="0"/>
+                        <a:cs typeface="Noto Sans CJK JP" charset="0"/>
+                      </a:endParaRPr>
+                    </a:p>
+                    <a:p>
+                      <a:pPr indent="0" marL="0">
+                        <a:buNone/>
+                      </a:pPr>
+                      <a:r>
+                        <a:rPr lang="en-US" sz="1250" dirty="0">
+                          <a:solidFill>
+                            <a:srgbClr val="153C38"/>
+                          </a:solidFill>
+                          <a:latin typeface="Noto Sans CJK JP" pitchFamily="34" charset="0"/>
+                          <a:ea typeface="Noto Sans CJK JP" pitchFamily="34" charset="-122"/>
+                          <a:cs typeface="Noto Sans CJK JP" pitchFamily="34" charset="-120"/>
+                        </a:rPr>
+                        <a:t>Ordinary code compares routes</a:t>
+                      </a:r>
+                      <a:endParaRPr lang="en-US" sz="1250" dirty="0">
+                        <a:latin typeface="Noto Sans CJK JP" charset="0"/>
+                        <a:ea typeface="Noto Sans CJK JP" charset="0"/>
+                        <a:cs typeface="Noto Sans CJK JP" charset="0"/>
+                      </a:endParaRPr>
+                    </a:p>
+                  </a:txBody>
+                  <a:tcPr marL="54864" marR="54864" marT="54864" marB="54864" anchor="mid">
+                    <a:lnL w="7620" cap="flat" cmpd="sng" algn="ctr">
+                      <a:solidFill>
+                        <a:srgbClr val="CBD8CE"/>
+                      </a:solidFill>
+                      <a:prstDash val="solid"/>
+                      <a:round/>
+                      <a:headEnd type="none" w="med" len="med"/>
+                      <a:tailEnd type="none" w="med" len="med"/>
+                    </a:lnL>
+                    <a:lnR w="7620" cap="flat" cmpd="sng" algn="ctr">
+                      <a:solidFill>
+                        <a:srgbClr val="CBD8CE"/>
+                      </a:solidFill>
+                      <a:prstDash val="solid"/>
+                      <a:round/>
+                      <a:headEnd type="none" w="med" len="med"/>
+                      <a:tailEnd type="none" w="med" len="med"/>
+                    </a:lnR>
+                    <a:lnT w="7620" cap="flat" cmpd="sng" algn="ctr">
+                      <a:solidFill>
+                        <a:srgbClr val="CBD8CE"/>
+                      </a:solidFill>
+                      <a:prstDash val="solid"/>
+                      <a:round/>
+                      <a:headEnd type="none" w="med" len="med"/>
+                      <a:tailEnd type="none" w="med" len="med"/>
+                    </a:lnT>
+                    <a:lnB w="7620" cap="flat" cmpd="sng" algn="ctr">
+                      <a:solidFill>
+                        <a:srgbClr val="CBD8CE"/>
+                      </a:solidFill>
+                      <a:prstDash val="solid"/>
+                      <a:round/>
+                      <a:headEnd type="none" w="med" len="med"/>
+                      <a:tailEnd type="none" w="med" len="med"/>
+                    </a:lnB>
+                    <a:solidFill>
+                      <a:srgbClr val="F4F6EF"/>
+                    </a:solidFill>
+                  </a:tcPr>
+                </a:tc>
+                <a:tc>
+                  <a:txBody>
+                    <a:bodyPr/>
+                    <a:lstStyle/>
+                    <a:p>
+                      <a:pPr indent="0" marL="0">
+                        <a:buNone/>
+                      </a:pPr>
+                      <a:r>
+                        <a:rPr lang="en-US" sz="1250" dirty="0">
+                          <a:solidFill>
+                            <a:srgbClr val="153C38"/>
+                          </a:solidFill>
+                          <a:latin typeface="Noto Sans CJK JP" pitchFamily="34" charset="0"/>
+                          <a:ea typeface="Noto Sans CJK JP" pitchFamily="34" charset="-122"/>
+                          <a:cs typeface="Noto Sans CJK JP" pitchFamily="34" charset="-120"/>
+                        </a:rPr>
+                        <a:t>HTTP / JSON ↔ UI</a:t>
+                      </a:r>
+                      <a:endParaRPr lang="en-US" sz="1250" dirty="0">
+                        <a:latin typeface="Noto Sans CJK JP" charset="0"/>
+                        <a:ea typeface="Noto Sans CJK JP" charset="0"/>
+                        <a:cs typeface="Noto Sans CJK JP" charset="0"/>
+                      </a:endParaRPr>
+                    </a:p>
+                    <a:p>
+                      <a:pPr indent="0" marL="0">
+                        <a:buNone/>
+                      </a:pPr>
+                      <a:r>
+                        <a:rPr lang="en-US" sz="1250" dirty="0">
+                          <a:solidFill>
+                            <a:srgbClr val="153C38"/>
+                          </a:solidFill>
+                          <a:latin typeface="Noto Sans CJK JP" pitchFamily="34" charset="0"/>
+                          <a:ea typeface="Noto Sans CJK JP" pitchFamily="34" charset="-122"/>
+                          <a:cs typeface="Noto Sans CJK JP" pitchFamily="34" charset="-120"/>
+                        </a:rPr>
+                        <a:t>JSON Lines ↔ Python</a:t>
+                      </a:r>
+                      <a:endParaRPr lang="en-US" sz="1250" dirty="0">
+                        <a:latin typeface="Noto Sans CJK JP" charset="0"/>
+                        <a:ea typeface="Noto Sans CJK JP" charset="0"/>
+                        <a:cs typeface="Noto Sans CJK JP" charset="0"/>
+                      </a:endParaRPr>
+                    </a:p>
+                  </a:txBody>
+                  <a:tcPr marL="54864" marR="54864" marT="54864" marB="54864" anchor="mid">
+                    <a:lnL w="7620" cap="flat" cmpd="sng" algn="ctr">
+                      <a:solidFill>
+                        <a:srgbClr val="CBD8CE"/>
+                      </a:solidFill>
+                      <a:prstDash val="solid"/>
+                      <a:round/>
+                      <a:headEnd type="none" w="med" len="med"/>
+                      <a:tailEnd type="none" w="med" len="med"/>
+                    </a:lnL>
+                    <a:lnR w="7620" cap="flat" cmpd="sng" algn="ctr">
+                      <a:solidFill>
+                        <a:srgbClr val="CBD8CE"/>
+                      </a:solidFill>
+                      <a:prstDash val="solid"/>
+                      <a:round/>
+                      <a:headEnd type="none" w="med" len="med"/>
+                      <a:tailEnd type="none" w="med" len="med"/>
+                    </a:lnR>
+                    <a:lnT w="7620" cap="flat" cmpd="sng" algn="ctr">
+                      <a:solidFill>
+                        <a:srgbClr val="CBD8CE"/>
+                      </a:solidFill>
+                      <a:prstDash val="solid"/>
+                      <a:round/>
+                      <a:headEnd type="none" w="med" len="med"/>
+                      <a:tailEnd type="none" w="med" len="med"/>
+                    </a:lnT>
+                    <a:lnB w="7620" cap="flat" cmpd="sng" algn="ctr">
+                      <a:solidFill>
+                        <a:srgbClr val="CBD8CE"/>
+                      </a:solidFill>
+                      <a:prstDash val="solid"/>
+                      <a:round/>
+                      <a:headEnd type="none" w="med" len="med"/>
+                      <a:tailEnd type="none" w="med" len="med"/>
+                    </a:lnB>
+                    <a:solidFill>
+                      <a:srgbClr val="F4F6EF"/>
+                    </a:solidFill>
+                  </a:tcPr>
+                </a:tc>
+              </a:tr>
+              <a:tr h="521208">
+                <a:tc>
+                  <a:txBody>
+                    <a:bodyPr/>
+                    <a:lstStyle/>
+                    <a:p>
+                      <a:pPr indent="0" marL="0">
+                        <a:buNone/>
+                      </a:pPr>
+                      <a:r>
+                        <a:rPr lang="en-US" sz="1250" dirty="0">
+                          <a:solidFill>
+                            <a:srgbClr val="153C38"/>
+                          </a:solidFill>
+                          <a:latin typeface="Noto Sans CJK JP" pitchFamily="34" charset="0"/>
+                          <a:ea typeface="Noto Sans CJK JP" pitchFamily="34" charset="-122"/>
+                          <a:cs typeface="Noto Sans CJK JP" pitchFamily="34" charset="-120"/>
+                        </a:rPr>
+                        <a:t>Full-neuron runtime</a:t>
+                      </a:r>
+                      <a:endParaRPr lang="en-US" sz="1250" dirty="0">
+                        <a:latin typeface="Noto Sans CJK JP" charset="0"/>
+                        <a:ea typeface="Noto Sans CJK JP" charset="0"/>
+                        <a:cs typeface="Noto Sans CJK JP" charset="0"/>
+                      </a:endParaRPr>
+                    </a:p>
+                  </a:txBody>
+                  <a:tcPr marL="54864" marR="54864" marT="54864" marB="54864" anchor="mid">
+                    <a:lnL w="7620" cap="flat" cmpd="sng" algn="ctr">
+                      <a:solidFill>
+                        <a:srgbClr val="CBD8CE"/>
+                      </a:solidFill>
+                      <a:prstDash val="solid"/>
+                      <a:round/>
+                      <a:headEnd type="none" w="med" len="med"/>
+                      <a:tailEnd type="none" w="med" len="med"/>
+                    </a:lnL>
+                    <a:lnR w="7620" cap="flat" cmpd="sng" algn="ctr">
+                      <a:solidFill>
+                        <a:srgbClr val="CBD8CE"/>
+                      </a:solidFill>
+                      <a:prstDash val="solid"/>
+                      <a:round/>
+                      <a:headEnd type="none" w="med" len="med"/>
+                      <a:tailEnd type="none" w="med" len="med"/>
+                    </a:lnR>
+                    <a:lnT w="7620" cap="flat" cmpd="sng" algn="ctr">
+                      <a:solidFill>
+                        <a:srgbClr val="CBD8CE"/>
+                      </a:solidFill>
+                      <a:prstDash val="solid"/>
+                      <a:round/>
+                      <a:headEnd type="none" w="med" len="med"/>
+                      <a:tailEnd type="none" w="med" len="med"/>
+                    </a:lnT>
+                    <a:lnB w="7620" cap="flat" cmpd="sng" algn="ctr">
+                      <a:solidFill>
+                        <a:srgbClr val="CBD8CE"/>
+                      </a:solidFill>
+                      <a:prstDash val="solid"/>
+                      <a:round/>
+                      <a:headEnd type="none" w="med" len="med"/>
+                      <a:tailEnd type="none" w="med" len="med"/>
+                    </a:lnB>
+                    <a:solidFill>
+                      <a:srgbClr val="F4F6EF"/>
+                    </a:solidFill>
+                  </a:tcPr>
+                </a:tc>
+                <a:tc>
+                  <a:txBody>
+                    <a:bodyPr/>
+                    <a:lstStyle/>
+                    <a:p>
+                      <a:pPr indent="0" marL="0">
+                        <a:buNone/>
+                      </a:pPr>
+                      <a:r>
+                        <a:rPr lang="en-US" sz="1250" dirty="0">
+                          <a:solidFill>
+                            <a:srgbClr val="153C38"/>
+                          </a:solidFill>
+                          <a:latin typeface="Noto Sans CJK JP" pitchFamily="34" charset="0"/>
+                          <a:ea typeface="Noto Sans CJK JP" pitchFamily="34" charset="-122"/>
+                          <a:cs typeface="Noto Sans CJK JP" pitchFamily="34" charset="-120"/>
+                        </a:rPr>
+                        <a:t>Python / NumPy / SciPy</a:t>
+                      </a:r>
+                      <a:endParaRPr lang="en-US" sz="1250" dirty="0">
+                        <a:latin typeface="Noto Sans CJK JP" charset="0"/>
+                        <a:ea typeface="Noto Sans CJK JP" charset="0"/>
+                        <a:cs typeface="Noto Sans CJK JP" charset="0"/>
+                      </a:endParaRPr>
+                    </a:p>
+                  </a:txBody>
+                  <a:tcPr marL="54864" marR="54864" marT="54864" marB="54864" anchor="mid">
+                    <a:lnL w="7620" cap="flat" cmpd="sng" algn="ctr">
+                      <a:solidFill>
+                        <a:srgbClr val="CBD8CE"/>
+                      </a:solidFill>
+                      <a:prstDash val="solid"/>
+                      <a:round/>
+                      <a:headEnd type="none" w="med" len="med"/>
+                      <a:tailEnd type="none" w="med" len="med"/>
+                    </a:lnL>
+                    <a:lnR w="7620" cap="flat" cmpd="sng" algn="ctr">
+                      <a:solidFill>
+                        <a:srgbClr val="CBD8CE"/>
+                      </a:solidFill>
+                      <a:prstDash val="solid"/>
+                      <a:round/>
+                      <a:headEnd type="none" w="med" len="med"/>
+                      <a:tailEnd type="none" w="med" len="med"/>
+                    </a:lnR>
+                    <a:lnT w="7620" cap="flat" cmpd="sng" algn="ctr">
+                      <a:solidFill>
+                        <a:srgbClr val="CBD8CE"/>
+                      </a:solidFill>
+                      <a:prstDash val="solid"/>
+                      <a:round/>
+                      <a:headEnd type="none" w="med" len="med"/>
+                      <a:tailEnd type="none" w="med" len="med"/>
+                    </a:lnT>
+                    <a:lnB w="7620" cap="flat" cmpd="sng" algn="ctr">
+                      <a:solidFill>
+                        <a:srgbClr val="CBD8CE"/>
+                      </a:solidFill>
+                      <a:prstDash val="solid"/>
+                      <a:round/>
+                      <a:headEnd type="none" w="med" len="med"/>
+                      <a:tailEnd type="none" w="med" len="med"/>
+                    </a:lnB>
+                    <a:solidFill>
+                      <a:srgbClr val="F4F6EF"/>
+                    </a:solidFill>
+                  </a:tcPr>
+                </a:tc>
+                <a:tc>
+                  <a:txBody>
+                    <a:bodyPr/>
+                    <a:lstStyle/>
+                    <a:p>
+                      <a:pPr indent="0" marL="0">
+                        <a:buNone/>
+                      </a:pPr>
+                      <a:r>
+                        <a:rPr lang="en-US" sz="1250" dirty="0">
+                          <a:solidFill>
+                            <a:srgbClr val="153C38"/>
+                          </a:solidFill>
+                          <a:latin typeface="Noto Sans CJK JP" pitchFamily="34" charset="0"/>
+                          <a:ea typeface="Noto Sans CJK JP" pitchFamily="34" charset="-122"/>
+                          <a:cs typeface="Noto Sans CJK JP" pitchFamily="34" charset="-120"/>
+                        </a:rPr>
+                        <a:t>166,700 neurons + readouts</a:t>
+                      </a:r>
+                      <a:endParaRPr lang="en-US" sz="1250" dirty="0">
+                        <a:latin typeface="Noto Sans CJK JP" charset="0"/>
+                        <a:ea typeface="Noto Sans CJK JP" charset="0"/>
+                        <a:cs typeface="Noto Sans CJK JP" charset="0"/>
+                      </a:endParaRPr>
+                    </a:p>
+                    <a:p>
+                      <a:pPr indent="0" marL="0">
+                        <a:buNone/>
+                      </a:pPr>
+                      <a:r>
+                        <a:rPr lang="en-US" sz="1250" dirty="0">
+                          <a:solidFill>
+                            <a:srgbClr val="153C38"/>
+                          </a:solidFill>
+                          <a:latin typeface="Noto Sans CJK JP" pitchFamily="34" charset="0"/>
+                          <a:ea typeface="Noto Sans CJK JP" pitchFamily="34" charset="-122"/>
+                          <a:cs typeface="Noto Sans CJK JP" pitchFamily="34" charset="-120"/>
+                        </a:rPr>
+                        <a:t>Foraging selection / market updates</a:t>
+                      </a:r>
+                      <a:endParaRPr lang="en-US" sz="1250" dirty="0">
+                        <a:latin typeface="Noto Sans CJK JP" charset="0"/>
+                        <a:ea typeface="Noto Sans CJK JP" charset="0"/>
+                        <a:cs typeface="Noto Sans CJK JP" charset="0"/>
+                      </a:endParaRPr>
+                    </a:p>
+                  </a:txBody>
+                  <a:tcPr marL="54864" marR="54864" marT="54864" marB="54864" anchor="mid">
+                    <a:lnL w="7620" cap="flat" cmpd="sng" algn="ctr">
+                      <a:solidFill>
+                        <a:srgbClr val="CBD8CE"/>
+                      </a:solidFill>
+                      <a:prstDash val="solid"/>
+                      <a:round/>
+                      <a:headEnd type="none" w="med" len="med"/>
+                      <a:tailEnd type="none" w="med" len="med"/>
+                    </a:lnL>
+                    <a:lnR w="7620" cap="flat" cmpd="sng" algn="ctr">
+                      <a:solidFill>
+                        <a:srgbClr val="CBD8CE"/>
+                      </a:solidFill>
+                      <a:prstDash val="solid"/>
+                      <a:round/>
+                      <a:headEnd type="none" w="med" len="med"/>
+                      <a:tailEnd type="none" w="med" len="med"/>
+                    </a:lnR>
+                    <a:lnT w="7620" cap="flat" cmpd="sng" algn="ctr">
+                      <a:solidFill>
+                        <a:srgbClr val="CBD8CE"/>
+                      </a:solidFill>
+                      <a:prstDash val="solid"/>
+                      <a:round/>
+                      <a:headEnd type="none" w="med" len="med"/>
+                      <a:tailEnd type="none" w="med" len="med"/>
+                    </a:lnT>
+                    <a:lnB w="7620" cap="flat" cmpd="sng" algn="ctr">
+                      <a:solidFill>
+                        <a:srgbClr val="CBD8CE"/>
+                      </a:solidFill>
+                      <a:prstDash val="solid"/>
+                      <a:round/>
+                      <a:headEnd type="none" w="med" len="med"/>
+                      <a:tailEnd type="none" w="med" len="med"/>
+                    </a:lnB>
+                    <a:solidFill>
+                      <a:srgbClr val="F4F6EF"/>
+                    </a:solidFill>
+                  </a:tcPr>
+                </a:tc>
+                <a:tc>
+                  <a:txBody>
+                    <a:bodyPr/>
+                    <a:lstStyle/>
+                    <a:p>
+                      <a:pPr indent="0" marL="0">
+                        <a:buNone/>
+                      </a:pPr>
+                      <a:r>
+                        <a:rPr lang="en-US" sz="1250" dirty="0">
+                          <a:solidFill>
+                            <a:srgbClr val="153C38"/>
+                          </a:solidFill>
+                          <a:latin typeface="Noto Sans CJK JP" pitchFamily="34" charset="0"/>
+                          <a:ea typeface="Noto Sans CJK JP" pitchFamily="34" charset="-122"/>
+                          <a:cs typeface="Noto Sans CJK JP" pitchFamily="34" charset="-120"/>
+                        </a:rPr>
+                        <a:t>Numeric inputs → actions</a:t>
+                      </a:r>
+                      <a:endParaRPr lang="en-US" sz="1250" dirty="0">
+                        <a:latin typeface="Noto Sans CJK JP" charset="0"/>
+                        <a:ea typeface="Noto Sans CJK JP" charset="0"/>
+                        <a:cs typeface="Noto Sans CJK JP" charset="0"/>
+                      </a:endParaRPr>
+                    </a:p>
+                    <a:p>
+                      <a:pPr indent="0" marL="0">
+                        <a:buNone/>
+                      </a:pPr>
+                      <a:r>
+                        <a:rPr lang="en-US" sz="1250" dirty="0">
+                          <a:solidFill>
+                            <a:srgbClr val="153C38"/>
+                          </a:solidFill>
+                          <a:latin typeface="Noto Sans CJK JP" pitchFamily="34" charset="0"/>
+                          <a:ea typeface="Noto Sans CJK JP" pitchFamily="34" charset="-122"/>
+                          <a:cs typeface="Noto Sans CJK JP" pitchFamily="34" charset="-120"/>
+                        </a:rPr>
+                        <a:t>Outcomes → learning / storage</a:t>
+                      </a:r>
+                      <a:endParaRPr lang="en-US" sz="1250" dirty="0">
+                        <a:latin typeface="Noto Sans CJK JP" charset="0"/>
+                        <a:ea typeface="Noto Sans CJK JP" charset="0"/>
+                        <a:cs typeface="Noto Sans CJK JP" charset="0"/>
+                      </a:endParaRPr>
+                    </a:p>
+                  </a:txBody>
+                  <a:tcPr marL="54864" marR="54864" marT="54864" marB="54864" anchor="mid">
+                    <a:lnL w="7620" cap="flat" cmpd="sng" algn="ctr">
+                      <a:solidFill>
+                        <a:srgbClr val="CBD8CE"/>
+                      </a:solidFill>
+                      <a:prstDash val="solid"/>
+                      <a:round/>
+                      <a:headEnd type="none" w="med" len="med"/>
+                      <a:tailEnd type="none" w="med" len="med"/>
+                    </a:lnL>
+                    <a:lnR w="7620" cap="flat" cmpd="sng" algn="ctr">
+                      <a:solidFill>
+                        <a:srgbClr val="CBD8CE"/>
+                      </a:solidFill>
+                      <a:prstDash val="solid"/>
+                      <a:round/>
+                      <a:headEnd type="none" w="med" len="med"/>
+                      <a:tailEnd type="none" w="med" len="med"/>
+                    </a:lnR>
+                    <a:lnT w="7620" cap="flat" cmpd="sng" algn="ctr">
+                      <a:solidFill>
+                        <a:srgbClr val="CBD8CE"/>
+                      </a:solidFill>
+                      <a:prstDash val="solid"/>
+                      <a:round/>
+                      <a:headEnd type="none" w="med" len="med"/>
+                      <a:tailEnd type="none" w="med" len="med"/>
+                    </a:lnT>
+                    <a:lnB w="7620" cap="flat" cmpd="sng" algn="ctr">
+                      <a:solidFill>
+                        <a:srgbClr val="CBD8CE"/>
+                      </a:solidFill>
+                      <a:prstDash val="solid"/>
+                      <a:round/>
+                      <a:headEnd type="none" w="med" len="med"/>
+                      <a:tailEnd type="none" w="med" len="med"/>
+                    </a:lnB>
+                    <a:solidFill>
+                      <a:srgbClr val="F4F6EF"/>
+                    </a:solidFill>
+                  </a:tcPr>
+                </a:tc>
+              </a:tr>
+              <a:tr h="521208">
+                <a:tc>
+                  <a:txBody>
+                    <a:bodyPr/>
+                    <a:lstStyle/>
+                    <a:p>
+                      <a:pPr indent="0" marL="0">
+                        <a:buNone/>
+                      </a:pPr>
+                      <a:r>
+                        <a:rPr lang="en-US" sz="1250" dirty="0">
+                          <a:solidFill>
+                            <a:srgbClr val="153C38"/>
+                          </a:solidFill>
+                          <a:latin typeface="Noto Sans CJK JP" pitchFamily="34" charset="0"/>
+                          <a:ea typeface="Noto Sans CJK JP" pitchFamily="34" charset="-122"/>
+                          <a:cs typeface="Noto Sans CJK JP" pitchFamily="34" charset="-120"/>
+                        </a:rPr>
+                        <a:t>EVM contracts</a:t>
+                      </a:r>
+                      <a:endParaRPr lang="en-US" sz="1250" dirty="0">
+                        <a:latin typeface="Noto Sans CJK JP" charset="0"/>
+                        <a:ea typeface="Noto Sans CJK JP" charset="0"/>
+                        <a:cs typeface="Noto Sans CJK JP" charset="0"/>
+                      </a:endParaRPr>
+                    </a:p>
+                  </a:txBody>
+                  <a:tcPr marL="54864" marR="54864" marT="54864" marB="54864" anchor="mid">
+                    <a:lnL w="7620" cap="flat" cmpd="sng" algn="ctr">
+                      <a:solidFill>
+                        <a:srgbClr val="CBD8CE"/>
+                      </a:solidFill>
+                      <a:prstDash val="solid"/>
+                      <a:round/>
+                      <a:headEnd type="none" w="med" len="med"/>
+                      <a:tailEnd type="none" w="med" len="med"/>
+                    </a:lnL>
+                    <a:lnR w="7620" cap="flat" cmpd="sng" algn="ctr">
+                      <a:solidFill>
+                        <a:srgbClr val="CBD8CE"/>
+                      </a:solidFill>
+                      <a:prstDash val="solid"/>
+                      <a:round/>
+                      <a:headEnd type="none" w="med" len="med"/>
+                      <a:tailEnd type="none" w="med" len="med"/>
+                    </a:lnR>
+                    <a:lnT w="7620" cap="flat" cmpd="sng" algn="ctr">
+                      <a:solidFill>
+                        <a:srgbClr val="CBD8CE"/>
+                      </a:solidFill>
+                      <a:prstDash val="solid"/>
+                      <a:round/>
+                      <a:headEnd type="none" w="med" len="med"/>
+                      <a:tailEnd type="none" w="med" len="med"/>
+                    </a:lnT>
+                    <a:lnB w="7620" cap="flat" cmpd="sng" algn="ctr">
+                      <a:solidFill>
+                        <a:srgbClr val="CBD8CE"/>
+                      </a:solidFill>
+                      <a:prstDash val="solid"/>
+                      <a:round/>
+                      <a:headEnd type="none" w="med" len="med"/>
+                      <a:tailEnd type="none" w="med" len="med"/>
+                    </a:lnB>
+                    <a:solidFill>
+                      <a:srgbClr val="F4F6EF"/>
+                    </a:solidFill>
+                  </a:tcPr>
+                </a:tc>
+                <a:tc>
+                  <a:txBody>
+                    <a:bodyPr/>
+                    <a:lstStyle/>
+                    <a:p>
+                      <a:pPr indent="0" marL="0">
+                        <a:buNone/>
+                      </a:pPr>
+                      <a:r>
+                        <a:rPr lang="en-US" sz="1250" dirty="0">
+                          <a:solidFill>
+                            <a:srgbClr val="153C38"/>
+                          </a:solidFill>
+                          <a:latin typeface="Noto Sans CJK JP" pitchFamily="34" charset="0"/>
+                          <a:ea typeface="Noto Sans CJK JP" pitchFamily="34" charset="-122"/>
+                          <a:cs typeface="Noto Sans CJK JP" pitchFamily="34" charset="-120"/>
+                        </a:rPr>
+                        <a:t>Solidity 0.8.30</a:t>
+                      </a:r>
+                      <a:endParaRPr lang="en-US" sz="1250" dirty="0">
+                        <a:latin typeface="Noto Sans CJK JP" charset="0"/>
+                        <a:ea typeface="Noto Sans CJK JP" charset="0"/>
+                        <a:cs typeface="Noto Sans CJK JP" charset="0"/>
+                      </a:endParaRPr>
+                    </a:p>
+                    <a:p>
+                      <a:pPr indent="0" marL="0">
+                        <a:buNone/>
+                      </a:pPr>
+                      <a:r>
+                        <a:rPr lang="en-US" sz="1250" dirty="0">
+                          <a:solidFill>
+                            <a:srgbClr val="153C38"/>
+                          </a:solidFill>
+                          <a:latin typeface="Noto Sans CJK JP" pitchFamily="34" charset="0"/>
+                          <a:ea typeface="Noto Sans CJK JP" pitchFamily="34" charset="-122"/>
+                          <a:cs typeface="Noto Sans CJK JP" pitchFamily="34" charset="-120"/>
+                        </a:rPr>
+                        <a:t>Project-owned contracts</a:t>
+                      </a:r>
+                      <a:endParaRPr lang="en-US" sz="1250" dirty="0">
+                        <a:latin typeface="Noto Sans CJK JP" charset="0"/>
+                        <a:ea typeface="Noto Sans CJK JP" charset="0"/>
+                        <a:cs typeface="Noto Sans CJK JP" charset="0"/>
+                      </a:endParaRPr>
+                    </a:p>
+                  </a:txBody>
+                  <a:tcPr marL="54864" marR="54864" marT="54864" marB="54864" anchor="mid">
+                    <a:lnL w="7620" cap="flat" cmpd="sng" algn="ctr">
+                      <a:solidFill>
+                        <a:srgbClr val="CBD8CE"/>
+                      </a:solidFill>
+                      <a:prstDash val="solid"/>
+                      <a:round/>
+                      <a:headEnd type="none" w="med" len="med"/>
+                      <a:tailEnd type="none" w="med" len="med"/>
+                    </a:lnL>
+                    <a:lnR w="7620" cap="flat" cmpd="sng" algn="ctr">
+                      <a:solidFill>
+                        <a:srgbClr val="CBD8CE"/>
+                      </a:solidFill>
+                      <a:prstDash val="solid"/>
+                      <a:round/>
+                      <a:headEnd type="none" w="med" len="med"/>
+                      <a:tailEnd type="none" w="med" len="med"/>
+                    </a:lnR>
+                    <a:lnT w="7620" cap="flat" cmpd="sng" algn="ctr">
+                      <a:solidFill>
+                        <a:srgbClr val="CBD8CE"/>
+                      </a:solidFill>
+                      <a:prstDash val="solid"/>
+                      <a:round/>
+                      <a:headEnd type="none" w="med" len="med"/>
+                      <a:tailEnd type="none" w="med" len="med"/>
+                    </a:lnT>
+                    <a:lnB w="7620" cap="flat" cmpd="sng" algn="ctr">
+                      <a:solidFill>
+                        <a:srgbClr val="CBD8CE"/>
+                      </a:solidFill>
+                      <a:prstDash val="solid"/>
+                      <a:round/>
+                      <a:headEnd type="none" w="med" len="med"/>
+                      <a:tailEnd type="none" w="med" len="med"/>
+                    </a:lnB>
+                    <a:solidFill>
+                      <a:srgbClr val="F4F6EF"/>
+                    </a:solidFill>
+                  </a:tcPr>
+                </a:tc>
+                <a:tc>
+                  <a:txBody>
+                    <a:bodyPr/>
+                    <a:lstStyle/>
+                    <a:p>
+                      <a:pPr indent="0" marL="0">
+                        <a:buNone/>
+                      </a:pPr>
+                      <a:r>
+                        <a:rPr lang="en-US" sz="1250" dirty="0">
+                          <a:solidFill>
+                            <a:srgbClr val="153C38"/>
+                          </a:solidFill>
+                          <a:latin typeface="Noto Sans CJK JP" pitchFamily="34" charset="0"/>
+                          <a:ea typeface="Noto Sans CJK JP" pitchFamily="34" charset="-122"/>
+                          <a:cs typeface="Noto Sans CJK JP" pitchFamily="34" charset="-120"/>
+                        </a:rPr>
+                        <a:t>Identity, model refs, world inputs</a:t>
+                      </a:r>
+                      <a:endParaRPr lang="en-US" sz="1250" dirty="0">
+                        <a:latin typeface="Noto Sans CJK JP" charset="0"/>
+                        <a:ea typeface="Noto Sans CJK JP" charset="0"/>
+                        <a:cs typeface="Noto Sans CJK JP" charset="0"/>
+                      </a:endParaRPr>
+                    </a:p>
+                    <a:p>
+                      <a:pPr indent="0" marL="0">
+                        <a:buNone/>
+                      </a:pPr>
+                      <a:r>
+                        <a:rPr lang="en-US" sz="1250" dirty="0">
+                          <a:solidFill>
+                            <a:srgbClr val="153C38"/>
+                          </a:solidFill>
+                          <a:latin typeface="Noto Sans CJK JP" pitchFamily="34" charset="0"/>
+                          <a:ea typeface="Noto Sans CJK JP" pitchFamily="34" charset="-122"/>
+                          <a:cs typeface="Noto Sans CJK JP" pitchFamily="34" charset="-120"/>
+                        </a:rPr>
+                        <a:t>Owner checks / market settlement</a:t>
+                      </a:r>
+                      <a:endParaRPr lang="en-US" sz="1250" dirty="0">
+                        <a:latin typeface="Noto Sans CJK JP" charset="0"/>
+                        <a:ea typeface="Noto Sans CJK JP" charset="0"/>
+                        <a:cs typeface="Noto Sans CJK JP" charset="0"/>
+                      </a:endParaRPr>
+                    </a:p>
+                  </a:txBody>
+                  <a:tcPr marL="54864" marR="54864" marT="54864" marB="54864" anchor="mid">
+                    <a:lnL w="7620" cap="flat" cmpd="sng" algn="ctr">
+                      <a:solidFill>
+                        <a:srgbClr val="CBD8CE"/>
+                      </a:solidFill>
+                      <a:prstDash val="solid"/>
+                      <a:round/>
+                      <a:headEnd type="none" w="med" len="med"/>
+                      <a:tailEnd type="none" w="med" len="med"/>
+                    </a:lnL>
+                    <a:lnR w="7620" cap="flat" cmpd="sng" algn="ctr">
+                      <a:solidFill>
+                        <a:srgbClr val="CBD8CE"/>
+                      </a:solidFill>
+                      <a:prstDash val="solid"/>
+                      <a:round/>
+                      <a:headEnd type="none" w="med" len="med"/>
+                      <a:tailEnd type="none" w="med" len="med"/>
+                    </a:lnR>
+                    <a:lnT w="7620" cap="flat" cmpd="sng" algn="ctr">
+                      <a:solidFill>
+                        <a:srgbClr val="CBD8CE"/>
+                      </a:solidFill>
+                      <a:prstDash val="solid"/>
+                      <a:round/>
+                      <a:headEnd type="none" w="med" len="med"/>
+                      <a:tailEnd type="none" w="med" len="med"/>
+                    </a:lnT>
+                    <a:lnB w="7620" cap="flat" cmpd="sng" algn="ctr">
+                      <a:solidFill>
+                        <a:srgbClr val="CBD8CE"/>
+                      </a:solidFill>
+                      <a:prstDash val="solid"/>
+                      <a:round/>
+                      <a:headEnd type="none" w="med" len="med"/>
+                      <a:tailEnd type="none" w="med" len="med"/>
+                    </a:lnB>
+                    <a:solidFill>
+                      <a:srgbClr val="F4F6EF"/>
+                    </a:solidFill>
+                  </a:tcPr>
+                </a:tc>
+                <a:tc>
+                  <a:txBody>
+                    <a:bodyPr/>
+                    <a:lstStyle/>
+                    <a:p>
+                      <a:pPr indent="0" marL="0">
+                        <a:buNone/>
+                      </a:pPr>
+                      <a:r>
+                        <a:rPr lang="en-US" sz="1250" dirty="0">
+                          <a:solidFill>
+                            <a:srgbClr val="153C38"/>
+                          </a:solidFill>
+                          <a:latin typeface="Noto Sans CJK JP" pitchFamily="34" charset="0"/>
+                          <a:ea typeface="Noto Sans CJK JP" pitchFamily="34" charset="-122"/>
+                          <a:cs typeface="Noto Sans CJK JP" pitchFamily="34" charset="-120"/>
+                        </a:rPr>
+                        <a:t>ABI / events</a:t>
+                      </a:r>
+                      <a:endParaRPr lang="en-US" sz="1250" dirty="0">
+                        <a:latin typeface="Noto Sans CJK JP" charset="0"/>
+                        <a:ea typeface="Noto Sans CJK JP" charset="0"/>
+                        <a:cs typeface="Noto Sans CJK JP" charset="0"/>
+                      </a:endParaRPr>
+                    </a:p>
+                    <a:p>
+                      <a:pPr indent="0" marL="0">
+                        <a:buNone/>
+                      </a:pPr>
+                      <a:r>
+                        <a:rPr lang="en-US" sz="1250" dirty="0">
+                          <a:solidFill>
+                            <a:srgbClr val="153C38"/>
+                          </a:solidFill>
+                          <a:latin typeface="Noto Sans CJK JP" pitchFamily="34" charset="0"/>
+                          <a:ea typeface="Noto Sans CJK JP" pitchFamily="34" charset="-122"/>
+                          <a:cs typeface="Noto Sans CJK JP" pitchFamily="34" charset="-120"/>
+                        </a:rPr>
+                        <a:t>Chain state / successful receipts</a:t>
+                      </a:r>
+                      <a:endParaRPr lang="en-US" sz="1250" dirty="0">
+                        <a:latin typeface="Noto Sans CJK JP" charset="0"/>
+                        <a:ea typeface="Noto Sans CJK JP" charset="0"/>
+                        <a:cs typeface="Noto Sans CJK JP" charset="0"/>
+                      </a:endParaRPr>
+                    </a:p>
+                  </a:txBody>
+                  <a:tcPr marL="54864" marR="54864" marT="54864" marB="54864" anchor="mid">
+                    <a:lnL w="7620" cap="flat" cmpd="sng" algn="ctr">
+                      <a:solidFill>
+                        <a:srgbClr val="CBD8CE"/>
+                      </a:solidFill>
+                      <a:prstDash val="solid"/>
+                      <a:round/>
+                      <a:headEnd type="none" w="med" len="med"/>
+                      <a:tailEnd type="none" w="med" len="med"/>
+                    </a:lnL>
+                    <a:lnR w="7620" cap="flat" cmpd="sng" algn="ctr">
+                      <a:solidFill>
+                        <a:srgbClr val="CBD8CE"/>
+                      </a:solidFill>
+                      <a:prstDash val="solid"/>
+                      <a:round/>
+                      <a:headEnd type="none" w="med" len="med"/>
+                      <a:tailEnd type="none" w="med" len="med"/>
+                    </a:lnR>
+                    <a:lnT w="7620" cap="flat" cmpd="sng" algn="ctr">
+                      <a:solidFill>
+                        <a:srgbClr val="CBD8CE"/>
+                      </a:solidFill>
+                      <a:prstDash val="solid"/>
+                      <a:round/>
+                      <a:headEnd type="none" w="med" len="med"/>
+                      <a:tailEnd type="none" w="med" len="med"/>
+                    </a:lnT>
+                    <a:lnB w="7620" cap="flat" cmpd="sng" algn="ctr">
+                      <a:solidFill>
+                        <a:srgbClr val="CBD8CE"/>
+                      </a:solidFill>
+                      <a:prstDash val="solid"/>
+                      <a:round/>
+                      <a:headEnd type="none" w="med" len="med"/>
+                      <a:tailEnd type="none" w="med" len="med"/>
+                    </a:lnB>
+                    <a:solidFill>
+                      <a:srgbClr val="F4F6EF"/>
+                    </a:solidFill>
+                  </a:tcPr>
+                </a:tc>
+              </a:tr>
+            </a:tbl>
+          </a:graphicData>
+        </a:graphic>
+      </p:graphicFrame>
+      <p:sp>
+        <p:nvSpPr>
+          <p:cNvPr id="5" name="Shape 2"/>
+          <p:cNvSpPr/>
+          <p:nvPr/>
+        </p:nvSpPr>
+        <p:spPr>
+          <a:xfrm>
+            <a:off x="548640" y="5788152"/>
+            <a:ext cx="11064240" cy="429768"/>
+          </a:xfrm>
+          <a:prstGeom prst="rect">
+            <a:avLst/>
+          </a:prstGeom>
+          <a:solidFill>
+            <a:srgbClr val="E4ECE1"/>
+          </a:solidFill>
+          <a:ln w="12700">
+            <a:solidFill>
+              <a:srgbClr val="E4ECE1"/>
+            </a:solidFill>
+            <a:prstDash val="solid"/>
+          </a:ln>
+        </p:spPr>
+      </p:sp>
+      <p:sp>
+        <p:nvSpPr>
+          <p:cNvPr id="6" name="Text 3"/>
+          <p:cNvSpPr/>
+          <p:nvPr/>
+        </p:nvSpPr>
+        <p:spPr>
+          <a:xfrm>
+            <a:off x="749808" y="5852160"/>
+            <a:ext cx="10661904" cy="256032"/>
+          </a:xfrm>
+          <a:prstGeom prst="rect">
+            <a:avLst/>
+          </a:prstGeom>
+          <a:noFill/>
+          <a:ln/>
+        </p:spPr>
+        <p:txBody>
+          <a:bodyPr wrap="square" lIns="0" tIns="0" rIns="0" bIns="0" rtlCol="0" anchor="ctr"/>
+          <a:lstStyle/>
+          <a:p>
+            <a:pPr indent="0" marL="0">
+              <a:buNone/>
+            </a:pPr>
+            <a:r>
+              <a:rPr lang="en-US" sz="1050" dirty="0">
+                <a:solidFill>
+                  <a:srgbClr val="244D43"/>
+                </a:solidFill>
+              </a:rPr>
+              <a:t>Shared types: a TypeScript proposal. Policies stay in browser/local storage. Full-neuron computation does not run in Workers.</a:t>
+            </a:r>
+            <a:endParaRPr lang="en-US" sz="1050" dirty="0"/>
+          </a:p>
+        </p:txBody>
+      </p:sp>
+      <p:sp>
+        <p:nvSpPr>
+          <p:cNvPr id="7" name="Text 4"/>
+          <p:cNvSpPr/>
+          <p:nvPr/>
+        </p:nvSpPr>
+        <p:spPr>
+          <a:xfrm>
+            <a:off x="548640" y="6364224"/>
+            <a:ext cx="11064240" cy="201168"/>
+          </a:xfrm>
+          <a:prstGeom prst="rect">
+            <a:avLst/>
+          </a:prstGeom>
+          <a:noFill/>
+          <a:ln/>
+        </p:spPr>
+        <p:txBody>
+          <a:bodyPr wrap="square" lIns="0" tIns="0" rIns="0" bIns="0" rtlCol="0" anchor="ctr"/>
+          <a:lstStyle/>
+          <a:p>
+            <a:pPr indent="0" marL="0">
+              <a:buNone/>
+            </a:pPr>
+            <a:r>
+              <a:rPr lang="en-US" sz="1000" dirty="0">
+                <a:solidFill>
+                  <a:srgbClr val="607B70"/>
+                </a:solidFill>
+              </a:rPr>
+              <a:t>7 / 7    ·    Appendix for Q&amp;A    ·    2026-09-26</a:t>
             </a:r>
             <a:endParaRPr lang="en-US" sz="1000" dirty="0"/>
           </a:p>
